--- a/docs/pptx/auc3/ritu-auc3-linsubhr-sens-anyhosp_10pct.pptx
+++ b/docs/pptx/auc3/ritu-auc3-linsubhr-sens-anyhosp_10pct.pptx
@@ -2443,7 +2443,7 @@
           </p:nvSpPr>
           <p:spPr>
             <a:xfrm>
-              <a:off x="1342929" y="2073503"/>
+              <a:off x="1343231" y="2073503"/>
               <a:ext cx="0" cy="3649639"/>
             </a:xfrm>
             <a:custGeom>
@@ -2486,7 +2486,7 @@
           </p:nvSpPr>
           <p:spPr>
             <a:xfrm>
-              <a:off x="2182565" y="2073503"/>
+              <a:off x="2181282" y="2073503"/>
               <a:ext cx="0" cy="3649639"/>
             </a:xfrm>
             <a:custGeom>
@@ -2529,7 +2529,7 @@
           </p:nvSpPr>
           <p:spPr>
             <a:xfrm>
-              <a:off x="3022201" y="2073503"/>
+              <a:off x="3019333" y="2073503"/>
               <a:ext cx="0" cy="3649639"/>
             </a:xfrm>
             <a:custGeom>
@@ -2572,7 +2572,7 @@
           </p:nvSpPr>
           <p:spPr>
             <a:xfrm>
-              <a:off x="3861838" y="2073503"/>
+              <a:off x="3857383" y="2073503"/>
               <a:ext cx="0" cy="3649639"/>
             </a:xfrm>
             <a:custGeom>
@@ -2615,7 +2615,7 @@
           </p:nvSpPr>
           <p:spPr>
             <a:xfrm>
-              <a:off x="4701474" y="2073503"/>
+              <a:off x="4695434" y="2073503"/>
               <a:ext cx="0" cy="3649639"/>
             </a:xfrm>
             <a:custGeom>
@@ -2658,7 +2658,7 @@
           </p:nvSpPr>
           <p:spPr>
             <a:xfrm>
-              <a:off x="5541110" y="2073503"/>
+              <a:off x="5533485" y="2073503"/>
               <a:ext cx="0" cy="3649639"/>
             </a:xfrm>
             <a:custGeom>
@@ -2701,7 +2701,7 @@
           </p:nvSpPr>
           <p:spPr>
             <a:xfrm>
-              <a:off x="6380746" y="2073503"/>
+              <a:off x="6371535" y="2073503"/>
               <a:ext cx="0" cy="3649639"/>
             </a:xfrm>
             <a:custGeom>
@@ -2744,7 +2744,7 @@
           </p:nvSpPr>
           <p:spPr>
             <a:xfrm>
-              <a:off x="7220382" y="2073503"/>
+              <a:off x="7209586" y="2073503"/>
               <a:ext cx="0" cy="3649639"/>
             </a:xfrm>
             <a:custGeom>
@@ -2787,7 +2787,7 @@
           </p:nvSpPr>
           <p:spPr>
             <a:xfrm>
-              <a:off x="8060018" y="2073503"/>
+              <a:off x="8047636" y="2073503"/>
               <a:ext cx="0" cy="3649639"/>
             </a:xfrm>
             <a:custGeom>
@@ -3045,7 +3045,7 @@
           </p:nvSpPr>
           <p:spPr>
             <a:xfrm>
-              <a:off x="923111" y="2073503"/>
+              <a:off x="924206" y="2073503"/>
               <a:ext cx="0" cy="3649639"/>
             </a:xfrm>
             <a:custGeom>
@@ -3088,7 +3088,7 @@
           </p:nvSpPr>
           <p:spPr>
             <a:xfrm>
-              <a:off x="1762747" y="2073503"/>
+              <a:off x="1762257" y="2073503"/>
               <a:ext cx="0" cy="3649639"/>
             </a:xfrm>
             <a:custGeom>
@@ -3131,7 +3131,7 @@
           </p:nvSpPr>
           <p:spPr>
             <a:xfrm>
-              <a:off x="2602383" y="2073503"/>
+              <a:off x="2600307" y="2073503"/>
               <a:ext cx="0" cy="3649639"/>
             </a:xfrm>
             <a:custGeom>
@@ -3174,7 +3174,7 @@
           </p:nvSpPr>
           <p:spPr>
             <a:xfrm>
-              <a:off x="3442019" y="2073503"/>
+              <a:off x="3438358" y="2073503"/>
               <a:ext cx="0" cy="3649639"/>
             </a:xfrm>
             <a:custGeom>
@@ -3217,7 +3217,7 @@
           </p:nvSpPr>
           <p:spPr>
             <a:xfrm>
-              <a:off x="4281656" y="2073503"/>
+              <a:off x="4276409" y="2073503"/>
               <a:ext cx="0" cy="3649639"/>
             </a:xfrm>
             <a:custGeom>
@@ -3260,7 +3260,7 @@
           </p:nvSpPr>
           <p:spPr>
             <a:xfrm>
-              <a:off x="5121292" y="2073503"/>
+              <a:off x="5114459" y="2073503"/>
               <a:ext cx="0" cy="3649639"/>
             </a:xfrm>
             <a:custGeom>
@@ -3303,7 +3303,7 @@
           </p:nvSpPr>
           <p:spPr>
             <a:xfrm>
-              <a:off x="5960928" y="2073503"/>
+              <a:off x="5952510" y="2073503"/>
               <a:ext cx="0" cy="3649639"/>
             </a:xfrm>
             <a:custGeom>
@@ -3346,7 +3346,7 @@
           </p:nvSpPr>
           <p:spPr>
             <a:xfrm>
-              <a:off x="6800564" y="2073503"/>
+              <a:off x="6790560" y="2073503"/>
               <a:ext cx="0" cy="3649639"/>
             </a:xfrm>
             <a:custGeom>
@@ -3389,7 +3389,7 @@
           </p:nvSpPr>
           <p:spPr>
             <a:xfrm>
-              <a:off x="7640200" y="2073503"/>
+              <a:off x="7628611" y="2073503"/>
               <a:ext cx="0" cy="3649639"/>
             </a:xfrm>
             <a:custGeom>
@@ -3432,7 +3432,7 @@
           </p:nvSpPr>
           <p:spPr>
             <a:xfrm>
-              <a:off x="8479836" y="2073503"/>
+              <a:off x="8466662" y="2073503"/>
               <a:ext cx="0" cy="3649639"/>
             </a:xfrm>
             <a:custGeom>
@@ -3476,551 +3476,554 @@
           <p:spPr>
             <a:xfrm>
               <a:off x="1172049" y="2073503"/>
-              <a:ext cx="7090630" cy="3368658"/>
+              <a:ext cx="7090630" cy="3369731"/>
             </a:xfrm>
             <a:custGeom>
               <a:avLst/>
               <a:pathLst>
-                <a:path w="7090630" h="3368658">
+                <a:path w="7090630" h="3369731">
                   <a:moveTo>
-                    <a:pt x="0" y="1655939"/>
+                    <a:pt x="0" y="1636829"/>
                   </a:moveTo>
                   <a:lnTo>
-                    <a:pt x="71622" y="1687684"/>
-                  </a:lnTo>
-                  <a:lnTo>
-                    <a:pt x="143245" y="1718877"/>
-                  </a:lnTo>
-                  <a:lnTo>
-                    <a:pt x="214867" y="1749529"/>
-                  </a:lnTo>
-                  <a:lnTo>
-                    <a:pt x="286490" y="1779648"/>
-                  </a:lnTo>
-                  <a:lnTo>
-                    <a:pt x="358112" y="1809245"/>
-                  </a:lnTo>
-                  <a:lnTo>
-                    <a:pt x="429735" y="1838327"/>
-                  </a:lnTo>
-                  <a:lnTo>
-                    <a:pt x="501357" y="1866904"/>
-                  </a:lnTo>
-                  <a:lnTo>
-                    <a:pt x="572980" y="1894985"/>
-                  </a:lnTo>
-                  <a:lnTo>
-                    <a:pt x="644602" y="1922578"/>
-                  </a:lnTo>
-                  <a:lnTo>
-                    <a:pt x="716225" y="1949692"/>
-                  </a:lnTo>
-                  <a:lnTo>
-                    <a:pt x="787847" y="1976335"/>
-                  </a:lnTo>
-                  <a:lnTo>
-                    <a:pt x="859470" y="2002515"/>
-                  </a:lnTo>
-                  <a:lnTo>
-                    <a:pt x="931092" y="2028241"/>
-                  </a:lnTo>
-                  <a:lnTo>
-                    <a:pt x="1002715" y="2053519"/>
-                  </a:lnTo>
-                  <a:lnTo>
-                    <a:pt x="1074337" y="2078359"/>
-                  </a:lnTo>
-                  <a:lnTo>
-                    <a:pt x="1145960" y="2102767"/>
-                  </a:lnTo>
-                  <a:lnTo>
-                    <a:pt x="1217582" y="2126752"/>
-                  </a:lnTo>
-                  <a:lnTo>
-                    <a:pt x="1289205" y="2150320"/>
-                  </a:lnTo>
-                  <a:lnTo>
-                    <a:pt x="1360827" y="2173478"/>
-                  </a:lnTo>
-                  <a:lnTo>
-                    <a:pt x="1432450" y="2196235"/>
-                  </a:lnTo>
-                  <a:lnTo>
-                    <a:pt x="1504073" y="2218596"/>
-                  </a:lnTo>
-                  <a:lnTo>
-                    <a:pt x="1575695" y="2240569"/>
-                  </a:lnTo>
-                  <a:lnTo>
-                    <a:pt x="1647318" y="2262160"/>
-                  </a:lnTo>
-                  <a:lnTo>
-                    <a:pt x="1718940" y="2283376"/>
-                  </a:lnTo>
-                  <a:lnTo>
-                    <a:pt x="1790563" y="2304223"/>
-                  </a:lnTo>
-                  <a:lnTo>
-                    <a:pt x="1862185" y="2324709"/>
-                  </a:lnTo>
-                  <a:lnTo>
-                    <a:pt x="1933808" y="2344839"/>
-                  </a:lnTo>
-                  <a:lnTo>
-                    <a:pt x="2005430" y="2364619"/>
-                  </a:lnTo>
-                  <a:lnTo>
-                    <a:pt x="2077053" y="2384056"/>
-                  </a:lnTo>
-                  <a:lnTo>
-                    <a:pt x="2148675" y="2403155"/>
-                  </a:lnTo>
-                  <a:lnTo>
-                    <a:pt x="2220298" y="2421922"/>
-                  </a:lnTo>
-                  <a:lnTo>
-                    <a:pt x="2291920" y="2440364"/>
-                  </a:lnTo>
-                  <a:lnTo>
-                    <a:pt x="2363543" y="2458485"/>
-                  </a:lnTo>
-                  <a:lnTo>
-                    <a:pt x="2435165" y="2476291"/>
-                  </a:lnTo>
-                  <a:lnTo>
-                    <a:pt x="2506788" y="2493788"/>
-                  </a:lnTo>
-                  <a:lnTo>
-                    <a:pt x="2578410" y="2510982"/>
-                  </a:lnTo>
-                  <a:lnTo>
-                    <a:pt x="2650033" y="2527876"/>
-                  </a:lnTo>
-                  <a:lnTo>
-                    <a:pt x="2721655" y="2544478"/>
-                  </a:lnTo>
-                  <a:lnTo>
-                    <a:pt x="2793278" y="2560791"/>
-                  </a:lnTo>
-                  <a:lnTo>
-                    <a:pt x="2864901" y="2576820"/>
-                  </a:lnTo>
-                  <a:lnTo>
-                    <a:pt x="2936523" y="2592571"/>
-                  </a:lnTo>
-                  <a:lnTo>
-                    <a:pt x="3008146" y="2608049"/>
-                  </a:lnTo>
-                  <a:lnTo>
-                    <a:pt x="3079768" y="2623258"/>
-                  </a:lnTo>
-                  <a:lnTo>
-                    <a:pt x="3151391" y="2638203"/>
-                  </a:lnTo>
-                  <a:lnTo>
-                    <a:pt x="3223013" y="2652888"/>
-                  </a:lnTo>
-                  <a:lnTo>
-                    <a:pt x="3294636" y="2620780"/>
-                  </a:lnTo>
-                  <a:lnTo>
-                    <a:pt x="3366258" y="2582145"/>
-                  </a:lnTo>
-                  <a:lnTo>
-                    <a:pt x="3437881" y="2541780"/>
-                  </a:lnTo>
-                  <a:lnTo>
-                    <a:pt x="3509503" y="2499607"/>
-                  </a:lnTo>
-                  <a:lnTo>
-                    <a:pt x="3581126" y="2455547"/>
-                  </a:lnTo>
-                  <a:lnTo>
-                    <a:pt x="3652748" y="2409514"/>
-                  </a:lnTo>
-                  <a:lnTo>
-                    <a:pt x="3724371" y="2361420"/>
-                  </a:lnTo>
-                  <a:lnTo>
-                    <a:pt x="3795993" y="2311173"/>
-                  </a:lnTo>
-                  <a:lnTo>
-                    <a:pt x="3867616" y="2258676"/>
-                  </a:lnTo>
-                  <a:lnTo>
-                    <a:pt x="3939238" y="2203829"/>
-                  </a:lnTo>
-                  <a:lnTo>
-                    <a:pt x="4010861" y="2146526"/>
-                  </a:lnTo>
-                  <a:lnTo>
-                    <a:pt x="4082483" y="2086658"/>
-                  </a:lnTo>
-                  <a:lnTo>
-                    <a:pt x="4154106" y="2024110"/>
-                  </a:lnTo>
-                  <a:lnTo>
-                    <a:pt x="4225729" y="1958761"/>
-                  </a:lnTo>
-                  <a:lnTo>
-                    <a:pt x="4297351" y="1890487"/>
-                  </a:lnTo>
-                  <a:lnTo>
-                    <a:pt x="4368974" y="1819156"/>
-                  </a:lnTo>
-                  <a:lnTo>
-                    <a:pt x="4440596" y="1744631"/>
-                  </a:lnTo>
-                  <a:lnTo>
-                    <a:pt x="4512219" y="1666770"/>
-                  </a:lnTo>
-                  <a:lnTo>
-                    <a:pt x="4583841" y="1585423"/>
-                  </a:lnTo>
-                  <a:lnTo>
-                    <a:pt x="4655464" y="1500434"/>
-                  </a:lnTo>
-                  <a:lnTo>
-                    <a:pt x="4727086" y="1411640"/>
-                  </a:lnTo>
-                  <a:lnTo>
-                    <a:pt x="4798709" y="1318871"/>
-                  </a:lnTo>
-                  <a:lnTo>
-                    <a:pt x="4870331" y="1221948"/>
-                  </a:lnTo>
-                  <a:lnTo>
-                    <a:pt x="4941954" y="1120686"/>
-                  </a:lnTo>
-                  <a:lnTo>
-                    <a:pt x="5013576" y="1014891"/>
-                  </a:lnTo>
-                  <a:lnTo>
-                    <a:pt x="5085199" y="904359"/>
-                  </a:lnTo>
-                  <a:lnTo>
-                    <a:pt x="5156821" y="788878"/>
-                  </a:lnTo>
-                  <a:lnTo>
-                    <a:pt x="5228444" y="668227"/>
-                  </a:lnTo>
-                  <a:lnTo>
-                    <a:pt x="5300066" y="542175"/>
-                  </a:lnTo>
-                  <a:lnTo>
-                    <a:pt x="5371689" y="410479"/>
-                  </a:lnTo>
-                  <a:lnTo>
-                    <a:pt x="5443311" y="272888"/>
-                  </a:lnTo>
-                  <a:lnTo>
-                    <a:pt x="5514934" y="129136"/>
-                  </a:lnTo>
-                  <a:lnTo>
-                    <a:pt x="5576517" y="0"/>
+                    <a:pt x="71622" y="1669108"/>
+                  </a:lnTo>
+                  <a:lnTo>
+                    <a:pt x="143245" y="1700823"/>
+                  </a:lnTo>
+                  <a:lnTo>
+                    <a:pt x="214867" y="1731984"/>
+                  </a:lnTo>
+                  <a:lnTo>
+                    <a:pt x="286490" y="1762600"/>
+                  </a:lnTo>
+                  <a:lnTo>
+                    <a:pt x="358112" y="1792681"/>
+                  </a:lnTo>
+                  <a:lnTo>
+                    <a:pt x="429735" y="1822237"/>
+                  </a:lnTo>
+                  <a:lnTo>
+                    <a:pt x="501357" y="1851275"/>
+                  </a:lnTo>
+                  <a:lnTo>
+                    <a:pt x="572980" y="1879807"/>
+                  </a:lnTo>
+                  <a:lnTo>
+                    <a:pt x="644602" y="1907839"/>
+                  </a:lnTo>
+                  <a:lnTo>
+                    <a:pt x="716225" y="1935382"/>
+                  </a:lnTo>
+                  <a:lnTo>
+                    <a:pt x="787847" y="1962443"/>
+                  </a:lnTo>
+                  <a:lnTo>
+                    <a:pt x="859470" y="1989032"/>
+                  </a:lnTo>
+                  <a:lnTo>
+                    <a:pt x="931092" y="2015155"/>
+                  </a:lnTo>
+                  <a:lnTo>
+                    <a:pt x="1002715" y="2040823"/>
+                  </a:lnTo>
+                  <a:lnTo>
+                    <a:pt x="1074337" y="2066041"/>
+                  </a:lnTo>
+                  <a:lnTo>
+                    <a:pt x="1145960" y="2090819"/>
+                  </a:lnTo>
+                  <a:lnTo>
+                    <a:pt x="1217582" y="2115163"/>
+                  </a:lnTo>
+                  <a:lnTo>
+                    <a:pt x="1289205" y="2139083"/>
+                  </a:lnTo>
+                  <a:lnTo>
+                    <a:pt x="1360827" y="2162584"/>
+                  </a:lnTo>
+                  <a:lnTo>
+                    <a:pt x="1432450" y="2185674"/>
+                  </a:lnTo>
+                  <a:lnTo>
+                    <a:pt x="1504073" y="2208361"/>
+                  </a:lnTo>
+                  <a:lnTo>
+                    <a:pt x="1575695" y="2230652"/>
+                  </a:lnTo>
+                  <a:lnTo>
+                    <a:pt x="1647318" y="2252552"/>
+                  </a:lnTo>
+                  <a:lnTo>
+                    <a:pt x="1718940" y="2274070"/>
+                  </a:lnTo>
+                  <a:lnTo>
+                    <a:pt x="1790563" y="2295212"/>
+                  </a:lnTo>
+                  <a:lnTo>
+                    <a:pt x="1862185" y="2315985"/>
+                  </a:lnTo>
+                  <a:lnTo>
+                    <a:pt x="1933808" y="2336394"/>
+                  </a:lnTo>
+                  <a:lnTo>
+                    <a:pt x="2005430" y="2356447"/>
+                  </a:lnTo>
+                  <a:lnTo>
+                    <a:pt x="2077053" y="2376149"/>
+                  </a:lnTo>
+                  <a:lnTo>
+                    <a:pt x="2148675" y="2395507"/>
+                  </a:lnTo>
+                  <a:lnTo>
+                    <a:pt x="2220298" y="2414527"/>
+                  </a:lnTo>
+                  <a:lnTo>
+                    <a:pt x="2291920" y="2433214"/>
+                  </a:lnTo>
+                  <a:lnTo>
+                    <a:pt x="2363543" y="2451574"/>
+                  </a:lnTo>
+                  <a:lnTo>
+                    <a:pt x="2435165" y="2469614"/>
+                  </a:lnTo>
+                  <a:lnTo>
+                    <a:pt x="2506788" y="2487338"/>
+                  </a:lnTo>
+                  <a:lnTo>
+                    <a:pt x="2578410" y="2504753"/>
+                  </a:lnTo>
+                  <a:lnTo>
+                    <a:pt x="2650033" y="2521863"/>
+                  </a:lnTo>
+                  <a:lnTo>
+                    <a:pt x="2721655" y="2538674"/>
+                  </a:lnTo>
+                  <a:lnTo>
+                    <a:pt x="2793278" y="2555192"/>
+                  </a:lnTo>
+                  <a:lnTo>
+                    <a:pt x="2864901" y="2571420"/>
+                  </a:lnTo>
+                  <a:lnTo>
+                    <a:pt x="2936523" y="2587365"/>
+                  </a:lnTo>
+                  <a:lnTo>
+                    <a:pt x="3008146" y="2603032"/>
+                  </a:lnTo>
+                  <a:lnTo>
+                    <a:pt x="3079768" y="2618424"/>
+                  </a:lnTo>
+                  <a:lnTo>
+                    <a:pt x="3151391" y="2633548"/>
+                  </a:lnTo>
+                  <a:lnTo>
+                    <a:pt x="3223013" y="2648407"/>
+                  </a:lnTo>
+                  <a:lnTo>
+                    <a:pt x="3294636" y="2632254"/>
+                  </a:lnTo>
+                  <a:lnTo>
+                    <a:pt x="3366258" y="2594210"/>
+                  </a:lnTo>
+                  <a:lnTo>
+                    <a:pt x="3437881" y="2554466"/>
+                  </a:lnTo>
+                  <a:lnTo>
+                    <a:pt x="3509503" y="2512946"/>
+                  </a:lnTo>
+                  <a:lnTo>
+                    <a:pt x="3581126" y="2469572"/>
+                  </a:lnTo>
+                  <a:lnTo>
+                    <a:pt x="3652748" y="2424259"/>
+                  </a:lnTo>
+                  <a:lnTo>
+                    <a:pt x="3724371" y="2376922"/>
+                  </a:lnTo>
+                  <a:lnTo>
+                    <a:pt x="3795993" y="2327470"/>
+                  </a:lnTo>
+                  <a:lnTo>
+                    <a:pt x="3867616" y="2275808"/>
+                  </a:lnTo>
+                  <a:lnTo>
+                    <a:pt x="3939238" y="2221838"/>
+                  </a:lnTo>
+                  <a:lnTo>
+                    <a:pt x="4010861" y="2165457"/>
+                  </a:lnTo>
+                  <a:lnTo>
+                    <a:pt x="4082483" y="2106556"/>
+                  </a:lnTo>
+                  <a:lnTo>
+                    <a:pt x="4154106" y="2045024"/>
+                  </a:lnTo>
+                  <a:lnTo>
+                    <a:pt x="4225729" y="1980743"/>
+                  </a:lnTo>
+                  <a:lnTo>
+                    <a:pt x="4297351" y="1913590"/>
+                  </a:lnTo>
+                  <a:lnTo>
+                    <a:pt x="4368974" y="1843436"/>
+                  </a:lnTo>
+                  <a:lnTo>
+                    <a:pt x="4440596" y="1770148"/>
+                  </a:lnTo>
+                  <a:lnTo>
+                    <a:pt x="4512219" y="1693586"/>
+                  </a:lnTo>
+                  <a:lnTo>
+                    <a:pt x="4583841" y="1613602"/>
+                  </a:lnTo>
+                  <a:lnTo>
+                    <a:pt x="4655464" y="1530045"/>
+                  </a:lnTo>
+                  <a:lnTo>
+                    <a:pt x="4727086" y="1442755"/>
+                  </a:lnTo>
+                  <a:lnTo>
+                    <a:pt x="4798709" y="1351565"/>
+                  </a:lnTo>
+                  <a:lnTo>
+                    <a:pt x="4870331" y="1256301"/>
+                  </a:lnTo>
+                  <a:lnTo>
+                    <a:pt x="4941954" y="1156780"/>
+                  </a:lnTo>
+                  <a:lnTo>
+                    <a:pt x="5013576" y="1052812"/>
+                  </a:lnTo>
+                  <a:lnTo>
+                    <a:pt x="5085199" y="944200"/>
+                  </a:lnTo>
+                  <a:lnTo>
+                    <a:pt x="5156821" y="830734"/>
+                  </a:lnTo>
+                  <a:lnTo>
+                    <a:pt x="5228444" y="712199"/>
+                  </a:lnTo>
+                  <a:lnTo>
+                    <a:pt x="5300066" y="588368"/>
+                  </a:lnTo>
+                  <a:lnTo>
+                    <a:pt x="5371689" y="459005"/>
+                  </a:lnTo>
+                  <a:lnTo>
+                    <a:pt x="5443311" y="323861"/>
+                  </a:lnTo>
+                  <a:lnTo>
+                    <a:pt x="5514934" y="182679"/>
+                  </a:lnTo>
+                  <a:lnTo>
+                    <a:pt x="5586557" y="35190"/>
+                  </a:lnTo>
+                  <a:lnTo>
+                    <a:pt x="5602914" y="0"/>
                   </a:lnTo>
                   <a:lnTo>
                     <a:pt x="7090630" y="0"/>
                   </a:lnTo>
                   <a:lnTo>
-                    <a:pt x="7090630" y="3161162"/>
-                  </a:lnTo>
-                  <a:lnTo>
-                    <a:pt x="7019007" y="3155461"/>
-                  </a:lnTo>
-                  <a:lnTo>
-                    <a:pt x="6947385" y="3149658"/>
-                  </a:lnTo>
-                  <a:lnTo>
-                    <a:pt x="6875762" y="3143753"/>
-                  </a:lnTo>
-                  <a:lnTo>
-                    <a:pt x="6804139" y="3137744"/>
-                  </a:lnTo>
-                  <a:lnTo>
-                    <a:pt x="6732517" y="3131629"/>
-                  </a:lnTo>
-                  <a:lnTo>
-                    <a:pt x="6660894" y="3125405"/>
-                  </a:lnTo>
-                  <a:lnTo>
-                    <a:pt x="6589272" y="3119071"/>
-                  </a:lnTo>
-                  <a:lnTo>
-                    <a:pt x="6517649" y="3112626"/>
-                  </a:lnTo>
-                  <a:lnTo>
-                    <a:pt x="6446027" y="3106067"/>
-                  </a:lnTo>
-                  <a:lnTo>
-                    <a:pt x="6374404" y="3099391"/>
-                  </a:lnTo>
-                  <a:lnTo>
-                    <a:pt x="6302782" y="3092598"/>
-                  </a:lnTo>
-                  <a:lnTo>
-                    <a:pt x="6231159" y="3085684"/>
-                  </a:lnTo>
-                  <a:lnTo>
-                    <a:pt x="6159537" y="3078649"/>
-                  </a:lnTo>
-                  <a:lnTo>
-                    <a:pt x="6087914" y="3071489"/>
-                  </a:lnTo>
-                  <a:lnTo>
-                    <a:pt x="6016292" y="3064202"/>
-                  </a:lnTo>
-                  <a:lnTo>
-                    <a:pt x="5944669" y="3056787"/>
-                  </a:lnTo>
-                  <a:lnTo>
-                    <a:pt x="5873047" y="3049241"/>
-                  </a:lnTo>
-                  <a:lnTo>
-                    <a:pt x="5801424" y="3041561"/>
-                  </a:lnTo>
-                  <a:lnTo>
-                    <a:pt x="5729802" y="3033745"/>
-                  </a:lnTo>
-                  <a:lnTo>
-                    <a:pt x="5658179" y="3025792"/>
-                  </a:lnTo>
-                  <a:lnTo>
-                    <a:pt x="5586557" y="3017698"/>
-                  </a:lnTo>
-                  <a:lnTo>
-                    <a:pt x="5514934" y="3009460"/>
-                  </a:lnTo>
-                  <a:lnTo>
-                    <a:pt x="5443311" y="3001078"/>
-                  </a:lnTo>
-                  <a:lnTo>
-                    <a:pt x="5371689" y="2992546"/>
-                  </a:lnTo>
-                  <a:lnTo>
-                    <a:pt x="5300066" y="2983865"/>
-                  </a:lnTo>
-                  <a:lnTo>
-                    <a:pt x="5228444" y="2975029"/>
-                  </a:lnTo>
-                  <a:lnTo>
-                    <a:pt x="5156821" y="2966038"/>
-                  </a:lnTo>
-                  <a:lnTo>
-                    <a:pt x="5085199" y="2956888"/>
-                  </a:lnTo>
-                  <a:lnTo>
-                    <a:pt x="5013576" y="2947576"/>
-                  </a:lnTo>
-                  <a:lnTo>
-                    <a:pt x="4941954" y="2938099"/>
-                  </a:lnTo>
-                  <a:lnTo>
-                    <a:pt x="4870331" y="2928455"/>
-                  </a:lnTo>
-                  <a:lnTo>
-                    <a:pt x="4798709" y="2918640"/>
-                  </a:lnTo>
-                  <a:lnTo>
-                    <a:pt x="4727086" y="2908652"/>
-                  </a:lnTo>
-                  <a:lnTo>
-                    <a:pt x="4655464" y="2898488"/>
-                  </a:lnTo>
-                  <a:lnTo>
-                    <a:pt x="4583841" y="2888143"/>
-                  </a:lnTo>
-                  <a:lnTo>
-                    <a:pt x="4512219" y="2877616"/>
-                  </a:lnTo>
-                  <a:lnTo>
-                    <a:pt x="4440596" y="2866903"/>
-                  </a:lnTo>
-                  <a:lnTo>
-                    <a:pt x="4368974" y="2856001"/>
-                  </a:lnTo>
-                  <a:lnTo>
-                    <a:pt x="4297351" y="2844906"/>
-                  </a:lnTo>
-                  <a:lnTo>
-                    <a:pt x="4225729" y="2833614"/>
-                  </a:lnTo>
-                  <a:lnTo>
-                    <a:pt x="4154106" y="2822123"/>
-                  </a:lnTo>
-                  <a:lnTo>
-                    <a:pt x="4082483" y="2810429"/>
-                  </a:lnTo>
-                  <a:lnTo>
-                    <a:pt x="4010861" y="2798529"/>
-                  </a:lnTo>
-                  <a:lnTo>
-                    <a:pt x="3939238" y="2786418"/>
-                  </a:lnTo>
-                  <a:lnTo>
-                    <a:pt x="3867616" y="2774093"/>
-                  </a:lnTo>
-                  <a:lnTo>
-                    <a:pt x="3795993" y="2761550"/>
-                  </a:lnTo>
-                  <a:lnTo>
-                    <a:pt x="3724371" y="2748785"/>
-                  </a:lnTo>
-                  <a:lnTo>
-                    <a:pt x="3652748" y="2735795"/>
-                  </a:lnTo>
-                  <a:lnTo>
-                    <a:pt x="3581126" y="2722575"/>
-                  </a:lnTo>
-                  <a:lnTo>
-                    <a:pt x="3509503" y="2709122"/>
-                  </a:lnTo>
-                  <a:lnTo>
-                    <a:pt x="3437881" y="2695431"/>
-                  </a:lnTo>
-                  <a:lnTo>
-                    <a:pt x="3366258" y="2681497"/>
-                  </a:lnTo>
-                  <a:lnTo>
-                    <a:pt x="3294636" y="2667318"/>
-                  </a:lnTo>
-                  <a:lnTo>
-                    <a:pt x="3223013" y="2657760"/>
-                  </a:lnTo>
-                  <a:lnTo>
-                    <a:pt x="3151391" y="2693155"/>
-                  </a:lnTo>
-                  <a:lnTo>
-                    <a:pt x="3079768" y="2727034"/>
-                  </a:lnTo>
-                  <a:lnTo>
-                    <a:pt x="3008146" y="2759460"/>
-                  </a:lnTo>
-                  <a:lnTo>
-                    <a:pt x="2936523" y="2790498"/>
-                  </a:lnTo>
-                  <a:lnTo>
-                    <a:pt x="2864901" y="2820205"/>
-                  </a:lnTo>
-                  <a:lnTo>
-                    <a:pt x="2793278" y="2848639"/>
-                  </a:lnTo>
-                  <a:lnTo>
-                    <a:pt x="2721655" y="2875854"/>
-                  </a:lnTo>
-                  <a:lnTo>
-                    <a:pt x="2650033" y="2901904"/>
-                  </a:lnTo>
-                  <a:lnTo>
-                    <a:pt x="2578410" y="2926837"/>
-                  </a:lnTo>
-                  <a:lnTo>
-                    <a:pt x="2506788" y="2950702"/>
-                  </a:lnTo>
-                  <a:lnTo>
-                    <a:pt x="2435165" y="2973544"/>
-                  </a:lnTo>
-                  <a:lnTo>
-                    <a:pt x="2363543" y="2995407"/>
-                  </a:lnTo>
-                  <a:lnTo>
-                    <a:pt x="2291920" y="3016333"/>
-                  </a:lnTo>
-                  <a:lnTo>
-                    <a:pt x="2220298" y="3036363"/>
-                  </a:lnTo>
-                  <a:lnTo>
-                    <a:pt x="2148675" y="3055534"/>
-                  </a:lnTo>
-                  <a:lnTo>
-                    <a:pt x="2077053" y="3073884"/>
-                  </a:lnTo>
-                  <a:lnTo>
-                    <a:pt x="2005430" y="3091447"/>
-                  </a:lnTo>
-                  <a:lnTo>
-                    <a:pt x="1933808" y="3108258"/>
-                  </a:lnTo>
-                  <a:lnTo>
-                    <a:pt x="1862185" y="3124349"/>
-                  </a:lnTo>
-                  <a:lnTo>
-                    <a:pt x="1790563" y="3139750"/>
-                  </a:lnTo>
-                  <a:lnTo>
-                    <a:pt x="1718940" y="3154490"/>
-                  </a:lnTo>
-                  <a:lnTo>
-                    <a:pt x="1647318" y="3168600"/>
-                  </a:lnTo>
-                  <a:lnTo>
-                    <a:pt x="1575695" y="3182104"/>
-                  </a:lnTo>
-                  <a:lnTo>
-                    <a:pt x="1504073" y="3195030"/>
-                  </a:lnTo>
-                  <a:lnTo>
-                    <a:pt x="1432450" y="3207402"/>
-                  </a:lnTo>
-                  <a:lnTo>
-                    <a:pt x="1360827" y="3219244"/>
-                  </a:lnTo>
-                  <a:lnTo>
-                    <a:pt x="1289205" y="3230579"/>
-                  </a:lnTo>
-                  <a:lnTo>
-                    <a:pt x="1217582" y="3241428"/>
-                  </a:lnTo>
-                  <a:lnTo>
-                    <a:pt x="1145960" y="3251811"/>
-                  </a:lnTo>
-                  <a:lnTo>
-                    <a:pt x="1074337" y="3261750"/>
-                  </a:lnTo>
-                  <a:lnTo>
-                    <a:pt x="1002715" y="3271263"/>
-                  </a:lnTo>
-                  <a:lnTo>
-                    <a:pt x="931092" y="3280369"/>
-                  </a:lnTo>
-                  <a:lnTo>
-                    <a:pt x="859470" y="3289084"/>
-                  </a:lnTo>
-                  <a:lnTo>
-                    <a:pt x="787847" y="3297425"/>
-                  </a:lnTo>
-                  <a:lnTo>
-                    <a:pt x="716225" y="3305410"/>
-                  </a:lnTo>
-                  <a:lnTo>
-                    <a:pt x="644602" y="3313052"/>
-                  </a:lnTo>
-                  <a:lnTo>
-                    <a:pt x="572980" y="3320366"/>
-                  </a:lnTo>
-                  <a:lnTo>
-                    <a:pt x="501357" y="3327368"/>
-                  </a:lnTo>
-                  <a:lnTo>
-                    <a:pt x="429735" y="3334069"/>
-                  </a:lnTo>
-                  <a:lnTo>
-                    <a:pt x="358112" y="3340483"/>
-                  </a:lnTo>
-                  <a:lnTo>
-                    <a:pt x="286490" y="3346622"/>
-                  </a:lnTo>
-                  <a:lnTo>
-                    <a:pt x="214867" y="3352498"/>
-                  </a:lnTo>
-                  <a:lnTo>
-                    <a:pt x="143245" y="3358122"/>
-                  </a:lnTo>
-                  <a:lnTo>
-                    <a:pt x="71622" y="3363505"/>
-                  </a:lnTo>
-                  <a:lnTo>
-                    <a:pt x="0" y="3368658"/>
+                    <a:pt x="7090630" y="3161371"/>
+                  </a:lnTo>
+                  <a:lnTo>
+                    <a:pt x="7019007" y="3155637"/>
+                  </a:lnTo>
+                  <a:lnTo>
+                    <a:pt x="6947385" y="3149801"/>
+                  </a:lnTo>
+                  <a:lnTo>
+                    <a:pt x="6875762" y="3143860"/>
+                  </a:lnTo>
+                  <a:lnTo>
+                    <a:pt x="6804139" y="3137814"/>
+                  </a:lnTo>
+                  <a:lnTo>
+                    <a:pt x="6732517" y="3131661"/>
+                  </a:lnTo>
+                  <a:lnTo>
+                    <a:pt x="6660894" y="3125398"/>
+                  </a:lnTo>
+                  <a:lnTo>
+                    <a:pt x="6589272" y="3119023"/>
+                  </a:lnTo>
+                  <a:lnTo>
+                    <a:pt x="6517649" y="3112535"/>
+                  </a:lnTo>
+                  <a:lnTo>
+                    <a:pt x="6446027" y="3105932"/>
+                  </a:lnTo>
+                  <a:lnTo>
+                    <a:pt x="6374404" y="3099212"/>
+                  </a:lnTo>
+                  <a:lnTo>
+                    <a:pt x="6302782" y="3092371"/>
+                  </a:lnTo>
+                  <a:lnTo>
+                    <a:pt x="6231159" y="3085410"/>
+                  </a:lnTo>
+                  <a:lnTo>
+                    <a:pt x="6159537" y="3078324"/>
+                  </a:lnTo>
+                  <a:lnTo>
+                    <a:pt x="6087914" y="3071112"/>
+                  </a:lnTo>
+                  <a:lnTo>
+                    <a:pt x="6016292" y="3063772"/>
+                  </a:lnTo>
+                  <a:lnTo>
+                    <a:pt x="5944669" y="3056301"/>
+                  </a:lnTo>
+                  <a:lnTo>
+                    <a:pt x="5873047" y="3048698"/>
+                  </a:lnTo>
+                  <a:lnTo>
+                    <a:pt x="5801424" y="3040959"/>
+                  </a:lnTo>
+                  <a:lnTo>
+                    <a:pt x="5729802" y="3033083"/>
+                  </a:lnTo>
+                  <a:lnTo>
+                    <a:pt x="5658179" y="3025066"/>
+                  </a:lnTo>
+                  <a:lnTo>
+                    <a:pt x="5586557" y="3016907"/>
+                  </a:lnTo>
+                  <a:lnTo>
+                    <a:pt x="5514934" y="3008603"/>
+                  </a:lnTo>
+                  <a:lnTo>
+                    <a:pt x="5443311" y="3000151"/>
+                  </a:lnTo>
+                  <a:lnTo>
+                    <a:pt x="5371689" y="2991549"/>
+                  </a:lnTo>
+                  <a:lnTo>
+                    <a:pt x="5300066" y="2982793"/>
+                  </a:lnTo>
+                  <a:lnTo>
+                    <a:pt x="5228444" y="2973882"/>
+                  </a:lnTo>
+                  <a:lnTo>
+                    <a:pt x="5156821" y="2964812"/>
+                  </a:lnTo>
+                  <a:lnTo>
+                    <a:pt x="5085199" y="2955582"/>
+                  </a:lnTo>
+                  <a:lnTo>
+                    <a:pt x="5013576" y="2946186"/>
+                  </a:lnTo>
+                  <a:lnTo>
+                    <a:pt x="4941954" y="2936624"/>
+                  </a:lnTo>
+                  <a:lnTo>
+                    <a:pt x="4870331" y="2926892"/>
+                  </a:lnTo>
+                  <a:lnTo>
+                    <a:pt x="4798709" y="2916986"/>
+                  </a:lnTo>
+                  <a:lnTo>
+                    <a:pt x="4727086" y="2906905"/>
+                  </a:lnTo>
+                  <a:lnTo>
+                    <a:pt x="4655464" y="2896644"/>
+                  </a:lnTo>
+                  <a:lnTo>
+                    <a:pt x="4583841" y="2886200"/>
+                  </a:lnTo>
+                  <a:lnTo>
+                    <a:pt x="4512219" y="2875571"/>
+                  </a:lnTo>
+                  <a:lnTo>
+                    <a:pt x="4440596" y="2864752"/>
+                  </a:lnTo>
+                  <a:lnTo>
+                    <a:pt x="4368974" y="2853742"/>
+                  </a:lnTo>
+                  <a:lnTo>
+                    <a:pt x="4297351" y="2842535"/>
+                  </a:lnTo>
+                  <a:lnTo>
+                    <a:pt x="4225729" y="2831129"/>
+                  </a:lnTo>
+                  <a:lnTo>
+                    <a:pt x="4154106" y="2819520"/>
+                  </a:lnTo>
+                  <a:lnTo>
+                    <a:pt x="4082483" y="2807705"/>
+                  </a:lnTo>
+                  <a:lnTo>
+                    <a:pt x="4010861" y="2795679"/>
+                  </a:lnTo>
+                  <a:lnTo>
+                    <a:pt x="3939238" y="2783439"/>
+                  </a:lnTo>
+                  <a:lnTo>
+                    <a:pt x="3867616" y="2770982"/>
+                  </a:lnTo>
+                  <a:lnTo>
+                    <a:pt x="3795993" y="2758303"/>
+                  </a:lnTo>
+                  <a:lnTo>
+                    <a:pt x="3724371" y="2745399"/>
+                  </a:lnTo>
+                  <a:lnTo>
+                    <a:pt x="3652748" y="2732265"/>
+                  </a:lnTo>
+                  <a:lnTo>
+                    <a:pt x="3581126" y="2718897"/>
+                  </a:lnTo>
+                  <a:lnTo>
+                    <a:pt x="3509503" y="2705292"/>
+                  </a:lnTo>
+                  <a:lnTo>
+                    <a:pt x="3437881" y="2691445"/>
+                  </a:lnTo>
+                  <a:lnTo>
+                    <a:pt x="3366258" y="2677351"/>
+                  </a:lnTo>
+                  <a:lnTo>
+                    <a:pt x="3294636" y="2663007"/>
+                  </a:lnTo>
+                  <a:lnTo>
+                    <a:pt x="3223013" y="2668671"/>
+                  </a:lnTo>
+                  <a:lnTo>
+                    <a:pt x="3151391" y="2703531"/>
+                  </a:lnTo>
+                  <a:lnTo>
+                    <a:pt x="3079768" y="2736899"/>
+                  </a:lnTo>
+                  <a:lnTo>
+                    <a:pt x="3008146" y="2768841"/>
+                  </a:lnTo>
+                  <a:lnTo>
+                    <a:pt x="2936523" y="2799416"/>
+                  </a:lnTo>
+                  <a:lnTo>
+                    <a:pt x="2864901" y="2828684"/>
+                  </a:lnTo>
+                  <a:lnTo>
+                    <a:pt x="2793278" y="2856700"/>
+                  </a:lnTo>
+                  <a:lnTo>
+                    <a:pt x="2721655" y="2883518"/>
+                  </a:lnTo>
+                  <a:lnTo>
+                    <a:pt x="2650033" y="2909189"/>
+                  </a:lnTo>
+                  <a:lnTo>
+                    <a:pt x="2578410" y="2933762"/>
+                  </a:lnTo>
+                  <a:lnTo>
+                    <a:pt x="2506788" y="2957284"/>
+                  </a:lnTo>
+                  <a:lnTo>
+                    <a:pt x="2435165" y="2979800"/>
+                  </a:lnTo>
+                  <a:lnTo>
+                    <a:pt x="2363543" y="3001353"/>
+                  </a:lnTo>
+                  <a:lnTo>
+                    <a:pt x="2291920" y="3021984"/>
+                  </a:lnTo>
+                  <a:lnTo>
+                    <a:pt x="2220298" y="3041733"/>
+                  </a:lnTo>
+                  <a:lnTo>
+                    <a:pt x="2148675" y="3060637"/>
+                  </a:lnTo>
+                  <a:lnTo>
+                    <a:pt x="2077053" y="3078733"/>
+                  </a:lnTo>
+                  <a:lnTo>
+                    <a:pt x="2005430" y="3096055"/>
+                  </a:lnTo>
+                  <a:lnTo>
+                    <a:pt x="1933808" y="3112636"/>
+                  </a:lnTo>
+                  <a:lnTo>
+                    <a:pt x="1862185" y="3128508"/>
+                  </a:lnTo>
+                  <a:lnTo>
+                    <a:pt x="1790563" y="3143701"/>
+                  </a:lnTo>
+                  <a:lnTo>
+                    <a:pt x="1718940" y="3158244"/>
+                  </a:lnTo>
+                  <a:lnTo>
+                    <a:pt x="1647318" y="3172165"/>
+                  </a:lnTo>
+                  <a:lnTo>
+                    <a:pt x="1575695" y="3185491"/>
+                  </a:lnTo>
+                  <a:lnTo>
+                    <a:pt x="1504073" y="3198247"/>
+                  </a:lnTo>
+                  <a:lnTo>
+                    <a:pt x="1432450" y="3210457"/>
+                  </a:lnTo>
+                  <a:lnTo>
+                    <a:pt x="1360827" y="3222146"/>
+                  </a:lnTo>
+                  <a:lnTo>
+                    <a:pt x="1289205" y="3233334"/>
+                  </a:lnTo>
+                  <a:lnTo>
+                    <a:pt x="1217582" y="3244044"/>
+                  </a:lnTo>
+                  <a:lnTo>
+                    <a:pt x="1145960" y="3254295"/>
+                  </a:lnTo>
+                  <a:lnTo>
+                    <a:pt x="1074337" y="3264109"/>
+                  </a:lnTo>
+                  <a:lnTo>
+                    <a:pt x="1002715" y="3273502"/>
+                  </a:lnTo>
+                  <a:lnTo>
+                    <a:pt x="931092" y="3282494"/>
+                  </a:lnTo>
+                  <a:lnTo>
+                    <a:pt x="859470" y="3291101"/>
+                  </a:lnTo>
+                  <a:lnTo>
+                    <a:pt x="787847" y="3299340"/>
+                  </a:lnTo>
+                  <a:lnTo>
+                    <a:pt x="716225" y="3307227"/>
+                  </a:lnTo>
+                  <a:lnTo>
+                    <a:pt x="644602" y="3314777"/>
+                  </a:lnTo>
+                  <a:lnTo>
+                    <a:pt x="572980" y="3322003"/>
+                  </a:lnTo>
+                  <a:lnTo>
+                    <a:pt x="501357" y="3328921"/>
+                  </a:lnTo>
+                  <a:lnTo>
+                    <a:pt x="429735" y="3335542"/>
+                  </a:lnTo>
+                  <a:lnTo>
+                    <a:pt x="358112" y="3341881"/>
+                  </a:lnTo>
+                  <a:lnTo>
+                    <a:pt x="286490" y="3347948"/>
+                  </a:lnTo>
+                  <a:lnTo>
+                    <a:pt x="214867" y="3353756"/>
+                  </a:lnTo>
+                  <a:lnTo>
+                    <a:pt x="143245" y="3359316"/>
+                  </a:lnTo>
+                  <a:lnTo>
+                    <a:pt x="71622" y="3364637"/>
+                  </a:lnTo>
+                  <a:lnTo>
+                    <a:pt x="0" y="3369731"/>
                   </a:lnTo>
                   <a:close/>
                 </a:path>
@@ -4047,248 +4050,251 @@
           <p:spPr>
             <a:xfrm>
               <a:off x="1172049" y="2073503"/>
-              <a:ext cx="5576517" cy="2652888"/>
+              <a:ext cx="5602914" cy="2648407"/>
             </a:xfrm>
             <a:custGeom>
               <a:avLst/>
               <a:pathLst>
-                <a:path w="5576517" h="2652888">
+                <a:path w="5602914" h="2648407">
                   <a:moveTo>
-                    <a:pt x="0" y="1655939"/>
+                    <a:pt x="0" y="1636829"/>
                   </a:moveTo>
                   <a:lnTo>
-                    <a:pt x="71622" y="1687684"/>
-                  </a:lnTo>
-                  <a:lnTo>
-                    <a:pt x="143245" y="1718877"/>
-                  </a:lnTo>
-                  <a:lnTo>
-                    <a:pt x="214867" y="1749529"/>
-                  </a:lnTo>
-                  <a:lnTo>
-                    <a:pt x="286490" y="1779648"/>
-                  </a:lnTo>
-                  <a:lnTo>
-                    <a:pt x="358112" y="1809245"/>
-                  </a:lnTo>
-                  <a:lnTo>
-                    <a:pt x="429735" y="1838327"/>
-                  </a:lnTo>
-                  <a:lnTo>
-                    <a:pt x="501357" y="1866904"/>
-                  </a:lnTo>
-                  <a:lnTo>
-                    <a:pt x="572980" y="1894985"/>
-                  </a:lnTo>
-                  <a:lnTo>
-                    <a:pt x="644602" y="1922578"/>
-                  </a:lnTo>
-                  <a:lnTo>
-                    <a:pt x="716225" y="1949692"/>
-                  </a:lnTo>
-                  <a:lnTo>
-                    <a:pt x="787847" y="1976335"/>
-                  </a:lnTo>
-                  <a:lnTo>
-                    <a:pt x="859470" y="2002515"/>
-                  </a:lnTo>
-                  <a:lnTo>
-                    <a:pt x="931092" y="2028241"/>
-                  </a:lnTo>
-                  <a:lnTo>
-                    <a:pt x="1002715" y="2053519"/>
-                  </a:lnTo>
-                  <a:lnTo>
-                    <a:pt x="1074337" y="2078359"/>
-                  </a:lnTo>
-                  <a:lnTo>
-                    <a:pt x="1145960" y="2102767"/>
-                  </a:lnTo>
-                  <a:lnTo>
-                    <a:pt x="1217582" y="2126752"/>
-                  </a:lnTo>
-                  <a:lnTo>
-                    <a:pt x="1289205" y="2150320"/>
-                  </a:lnTo>
-                  <a:lnTo>
-                    <a:pt x="1360827" y="2173478"/>
-                  </a:lnTo>
-                  <a:lnTo>
-                    <a:pt x="1432450" y="2196235"/>
-                  </a:lnTo>
-                  <a:lnTo>
-                    <a:pt x="1504073" y="2218596"/>
-                  </a:lnTo>
-                  <a:lnTo>
-                    <a:pt x="1575695" y="2240569"/>
-                  </a:lnTo>
-                  <a:lnTo>
-                    <a:pt x="1647318" y="2262160"/>
-                  </a:lnTo>
-                  <a:lnTo>
-                    <a:pt x="1718940" y="2283376"/>
-                  </a:lnTo>
-                  <a:lnTo>
-                    <a:pt x="1790563" y="2304223"/>
-                  </a:lnTo>
-                  <a:lnTo>
-                    <a:pt x="1862185" y="2324709"/>
-                  </a:lnTo>
-                  <a:lnTo>
-                    <a:pt x="1933808" y="2344839"/>
-                  </a:lnTo>
-                  <a:lnTo>
-                    <a:pt x="2005430" y="2364619"/>
-                  </a:lnTo>
-                  <a:lnTo>
-                    <a:pt x="2077053" y="2384056"/>
-                  </a:lnTo>
-                  <a:lnTo>
-                    <a:pt x="2148675" y="2403155"/>
-                  </a:lnTo>
-                  <a:lnTo>
-                    <a:pt x="2220298" y="2421922"/>
-                  </a:lnTo>
-                  <a:lnTo>
-                    <a:pt x="2291920" y="2440364"/>
-                  </a:lnTo>
-                  <a:lnTo>
-                    <a:pt x="2363543" y="2458485"/>
-                  </a:lnTo>
-                  <a:lnTo>
-                    <a:pt x="2435165" y="2476291"/>
-                  </a:lnTo>
-                  <a:lnTo>
-                    <a:pt x="2506788" y="2493788"/>
-                  </a:lnTo>
-                  <a:lnTo>
-                    <a:pt x="2578410" y="2510982"/>
-                  </a:lnTo>
-                  <a:lnTo>
-                    <a:pt x="2650033" y="2527876"/>
-                  </a:lnTo>
-                  <a:lnTo>
-                    <a:pt x="2721655" y="2544478"/>
-                  </a:lnTo>
-                  <a:lnTo>
-                    <a:pt x="2793278" y="2560791"/>
-                  </a:lnTo>
-                  <a:lnTo>
-                    <a:pt x="2864901" y="2576820"/>
-                  </a:lnTo>
-                  <a:lnTo>
-                    <a:pt x="2936523" y="2592571"/>
-                  </a:lnTo>
-                  <a:lnTo>
-                    <a:pt x="3008146" y="2608049"/>
-                  </a:lnTo>
-                  <a:lnTo>
-                    <a:pt x="3079768" y="2623258"/>
-                  </a:lnTo>
-                  <a:lnTo>
-                    <a:pt x="3151391" y="2638203"/>
-                  </a:lnTo>
-                  <a:lnTo>
-                    <a:pt x="3223013" y="2652888"/>
-                  </a:lnTo>
-                  <a:lnTo>
-                    <a:pt x="3294636" y="2620780"/>
-                  </a:lnTo>
-                  <a:lnTo>
-                    <a:pt x="3366258" y="2582145"/>
-                  </a:lnTo>
-                  <a:lnTo>
-                    <a:pt x="3437881" y="2541780"/>
-                  </a:lnTo>
-                  <a:lnTo>
-                    <a:pt x="3509503" y="2499607"/>
-                  </a:lnTo>
-                  <a:lnTo>
-                    <a:pt x="3581126" y="2455547"/>
-                  </a:lnTo>
-                  <a:lnTo>
-                    <a:pt x="3652748" y="2409514"/>
-                  </a:lnTo>
-                  <a:lnTo>
-                    <a:pt x="3724371" y="2361420"/>
-                  </a:lnTo>
-                  <a:lnTo>
-                    <a:pt x="3795993" y="2311173"/>
-                  </a:lnTo>
-                  <a:lnTo>
-                    <a:pt x="3867616" y="2258676"/>
-                  </a:lnTo>
-                  <a:lnTo>
-                    <a:pt x="3939238" y="2203829"/>
-                  </a:lnTo>
-                  <a:lnTo>
-                    <a:pt x="4010861" y="2146526"/>
-                  </a:lnTo>
-                  <a:lnTo>
-                    <a:pt x="4082483" y="2086658"/>
-                  </a:lnTo>
-                  <a:lnTo>
-                    <a:pt x="4154106" y="2024110"/>
-                  </a:lnTo>
-                  <a:lnTo>
-                    <a:pt x="4225729" y="1958761"/>
-                  </a:lnTo>
-                  <a:lnTo>
-                    <a:pt x="4297351" y="1890487"/>
-                  </a:lnTo>
-                  <a:lnTo>
-                    <a:pt x="4368974" y="1819156"/>
-                  </a:lnTo>
-                  <a:lnTo>
-                    <a:pt x="4440596" y="1744631"/>
-                  </a:lnTo>
-                  <a:lnTo>
-                    <a:pt x="4512219" y="1666770"/>
-                  </a:lnTo>
-                  <a:lnTo>
-                    <a:pt x="4583841" y="1585423"/>
-                  </a:lnTo>
-                  <a:lnTo>
-                    <a:pt x="4655464" y="1500434"/>
-                  </a:lnTo>
-                  <a:lnTo>
-                    <a:pt x="4727086" y="1411640"/>
-                  </a:lnTo>
-                  <a:lnTo>
-                    <a:pt x="4798709" y="1318871"/>
-                  </a:lnTo>
-                  <a:lnTo>
-                    <a:pt x="4870331" y="1221948"/>
-                  </a:lnTo>
-                  <a:lnTo>
-                    <a:pt x="4941954" y="1120686"/>
-                  </a:lnTo>
-                  <a:lnTo>
-                    <a:pt x="5013576" y="1014891"/>
-                  </a:lnTo>
-                  <a:lnTo>
-                    <a:pt x="5085199" y="904359"/>
-                  </a:lnTo>
-                  <a:lnTo>
-                    <a:pt x="5156821" y="788878"/>
-                  </a:lnTo>
-                  <a:lnTo>
-                    <a:pt x="5228444" y="668227"/>
-                  </a:lnTo>
-                  <a:lnTo>
-                    <a:pt x="5300066" y="542175"/>
-                  </a:lnTo>
-                  <a:lnTo>
-                    <a:pt x="5371689" y="410479"/>
-                  </a:lnTo>
-                  <a:lnTo>
-                    <a:pt x="5443311" y="272888"/>
-                  </a:lnTo>
-                  <a:lnTo>
-                    <a:pt x="5514934" y="129136"/>
-                  </a:lnTo>
-                  <a:lnTo>
-                    <a:pt x="5576517" y="0"/>
+                    <a:pt x="71622" y="1669108"/>
+                  </a:lnTo>
+                  <a:lnTo>
+                    <a:pt x="143245" y="1700823"/>
+                  </a:lnTo>
+                  <a:lnTo>
+                    <a:pt x="214867" y="1731984"/>
+                  </a:lnTo>
+                  <a:lnTo>
+                    <a:pt x="286490" y="1762600"/>
+                  </a:lnTo>
+                  <a:lnTo>
+                    <a:pt x="358112" y="1792681"/>
+                  </a:lnTo>
+                  <a:lnTo>
+                    <a:pt x="429735" y="1822237"/>
+                  </a:lnTo>
+                  <a:lnTo>
+                    <a:pt x="501357" y="1851275"/>
+                  </a:lnTo>
+                  <a:lnTo>
+                    <a:pt x="572980" y="1879807"/>
+                  </a:lnTo>
+                  <a:lnTo>
+                    <a:pt x="644602" y="1907839"/>
+                  </a:lnTo>
+                  <a:lnTo>
+                    <a:pt x="716225" y="1935382"/>
+                  </a:lnTo>
+                  <a:lnTo>
+                    <a:pt x="787847" y="1962443"/>
+                  </a:lnTo>
+                  <a:lnTo>
+                    <a:pt x="859470" y="1989032"/>
+                  </a:lnTo>
+                  <a:lnTo>
+                    <a:pt x="931092" y="2015155"/>
+                  </a:lnTo>
+                  <a:lnTo>
+                    <a:pt x="1002715" y="2040823"/>
+                  </a:lnTo>
+                  <a:lnTo>
+                    <a:pt x="1074337" y="2066041"/>
+                  </a:lnTo>
+                  <a:lnTo>
+                    <a:pt x="1145960" y="2090819"/>
+                  </a:lnTo>
+                  <a:lnTo>
+                    <a:pt x="1217582" y="2115163"/>
+                  </a:lnTo>
+                  <a:lnTo>
+                    <a:pt x="1289205" y="2139083"/>
+                  </a:lnTo>
+                  <a:lnTo>
+                    <a:pt x="1360827" y="2162584"/>
+                  </a:lnTo>
+                  <a:lnTo>
+                    <a:pt x="1432450" y="2185674"/>
+                  </a:lnTo>
+                  <a:lnTo>
+                    <a:pt x="1504073" y="2208361"/>
+                  </a:lnTo>
+                  <a:lnTo>
+                    <a:pt x="1575695" y="2230652"/>
+                  </a:lnTo>
+                  <a:lnTo>
+                    <a:pt x="1647318" y="2252552"/>
+                  </a:lnTo>
+                  <a:lnTo>
+                    <a:pt x="1718940" y="2274070"/>
+                  </a:lnTo>
+                  <a:lnTo>
+                    <a:pt x="1790563" y="2295212"/>
+                  </a:lnTo>
+                  <a:lnTo>
+                    <a:pt x="1862185" y="2315985"/>
+                  </a:lnTo>
+                  <a:lnTo>
+                    <a:pt x="1933808" y="2336394"/>
+                  </a:lnTo>
+                  <a:lnTo>
+                    <a:pt x="2005430" y="2356447"/>
+                  </a:lnTo>
+                  <a:lnTo>
+                    <a:pt x="2077053" y="2376149"/>
+                  </a:lnTo>
+                  <a:lnTo>
+                    <a:pt x="2148675" y="2395507"/>
+                  </a:lnTo>
+                  <a:lnTo>
+                    <a:pt x="2220298" y="2414527"/>
+                  </a:lnTo>
+                  <a:lnTo>
+                    <a:pt x="2291920" y="2433214"/>
+                  </a:lnTo>
+                  <a:lnTo>
+                    <a:pt x="2363543" y="2451574"/>
+                  </a:lnTo>
+                  <a:lnTo>
+                    <a:pt x="2435165" y="2469614"/>
+                  </a:lnTo>
+                  <a:lnTo>
+                    <a:pt x="2506788" y="2487338"/>
+                  </a:lnTo>
+                  <a:lnTo>
+                    <a:pt x="2578410" y="2504753"/>
+                  </a:lnTo>
+                  <a:lnTo>
+                    <a:pt x="2650033" y="2521863"/>
+                  </a:lnTo>
+                  <a:lnTo>
+                    <a:pt x="2721655" y="2538674"/>
+                  </a:lnTo>
+                  <a:lnTo>
+                    <a:pt x="2793278" y="2555192"/>
+                  </a:lnTo>
+                  <a:lnTo>
+                    <a:pt x="2864901" y="2571420"/>
+                  </a:lnTo>
+                  <a:lnTo>
+                    <a:pt x="2936523" y="2587365"/>
+                  </a:lnTo>
+                  <a:lnTo>
+                    <a:pt x="3008146" y="2603032"/>
+                  </a:lnTo>
+                  <a:lnTo>
+                    <a:pt x="3079768" y="2618424"/>
+                  </a:lnTo>
+                  <a:lnTo>
+                    <a:pt x="3151391" y="2633548"/>
+                  </a:lnTo>
+                  <a:lnTo>
+                    <a:pt x="3223013" y="2648407"/>
+                  </a:lnTo>
+                  <a:lnTo>
+                    <a:pt x="3294636" y="2632254"/>
+                  </a:lnTo>
+                  <a:lnTo>
+                    <a:pt x="3366258" y="2594210"/>
+                  </a:lnTo>
+                  <a:lnTo>
+                    <a:pt x="3437881" y="2554466"/>
+                  </a:lnTo>
+                  <a:lnTo>
+                    <a:pt x="3509503" y="2512946"/>
+                  </a:lnTo>
+                  <a:lnTo>
+                    <a:pt x="3581126" y="2469572"/>
+                  </a:lnTo>
+                  <a:lnTo>
+                    <a:pt x="3652748" y="2424259"/>
+                  </a:lnTo>
+                  <a:lnTo>
+                    <a:pt x="3724371" y="2376922"/>
+                  </a:lnTo>
+                  <a:lnTo>
+                    <a:pt x="3795993" y="2327470"/>
+                  </a:lnTo>
+                  <a:lnTo>
+                    <a:pt x="3867616" y="2275808"/>
+                  </a:lnTo>
+                  <a:lnTo>
+                    <a:pt x="3939238" y="2221838"/>
+                  </a:lnTo>
+                  <a:lnTo>
+                    <a:pt x="4010861" y="2165457"/>
+                  </a:lnTo>
+                  <a:lnTo>
+                    <a:pt x="4082483" y="2106556"/>
+                  </a:lnTo>
+                  <a:lnTo>
+                    <a:pt x="4154106" y="2045024"/>
+                  </a:lnTo>
+                  <a:lnTo>
+                    <a:pt x="4225729" y="1980743"/>
+                  </a:lnTo>
+                  <a:lnTo>
+                    <a:pt x="4297351" y="1913590"/>
+                  </a:lnTo>
+                  <a:lnTo>
+                    <a:pt x="4368974" y="1843436"/>
+                  </a:lnTo>
+                  <a:lnTo>
+                    <a:pt x="4440596" y="1770148"/>
+                  </a:lnTo>
+                  <a:lnTo>
+                    <a:pt x="4512219" y="1693586"/>
+                  </a:lnTo>
+                  <a:lnTo>
+                    <a:pt x="4583841" y="1613602"/>
+                  </a:lnTo>
+                  <a:lnTo>
+                    <a:pt x="4655464" y="1530045"/>
+                  </a:lnTo>
+                  <a:lnTo>
+                    <a:pt x="4727086" y="1442755"/>
+                  </a:lnTo>
+                  <a:lnTo>
+                    <a:pt x="4798709" y="1351565"/>
+                  </a:lnTo>
+                  <a:lnTo>
+                    <a:pt x="4870331" y="1256301"/>
+                  </a:lnTo>
+                  <a:lnTo>
+                    <a:pt x="4941954" y="1156780"/>
+                  </a:lnTo>
+                  <a:lnTo>
+                    <a:pt x="5013576" y="1052812"/>
+                  </a:lnTo>
+                  <a:lnTo>
+                    <a:pt x="5085199" y="944200"/>
+                  </a:lnTo>
+                  <a:lnTo>
+                    <a:pt x="5156821" y="830734"/>
+                  </a:lnTo>
+                  <a:lnTo>
+                    <a:pt x="5228444" y="712199"/>
+                  </a:lnTo>
+                  <a:lnTo>
+                    <a:pt x="5300066" y="588368"/>
+                  </a:lnTo>
+                  <a:lnTo>
+                    <a:pt x="5371689" y="459005"/>
+                  </a:lnTo>
+                  <a:lnTo>
+                    <a:pt x="5443311" y="323861"/>
+                  </a:lnTo>
+                  <a:lnTo>
+                    <a:pt x="5514934" y="182679"/>
+                  </a:lnTo>
+                  <a:lnTo>
+                    <a:pt x="5586557" y="35190"/>
+                  </a:lnTo>
+                  <a:lnTo>
+                    <a:pt x="5602914" y="0"/>
                   </a:lnTo>
                 </a:path>
               </a:pathLst>
@@ -4308,312 +4314,312 @@
           </p:nvSpPr>
           <p:spPr>
             <a:xfrm>
-              <a:off x="1172049" y="4731263"/>
-              <a:ext cx="7090630" cy="710897"/>
+              <a:off x="1172049" y="4736510"/>
+              <a:ext cx="7090630" cy="706724"/>
             </a:xfrm>
             <a:custGeom>
               <a:avLst/>
               <a:pathLst>
-                <a:path w="7090630" h="710897">
+                <a:path w="7090630" h="706724">
                   <a:moveTo>
-                    <a:pt x="7090630" y="503402"/>
+                    <a:pt x="7090630" y="498364"/>
                   </a:moveTo>
                   <a:lnTo>
-                    <a:pt x="7019007" y="497700"/>
-                  </a:lnTo>
-                  <a:lnTo>
-                    <a:pt x="6947385" y="491898"/>
-                  </a:lnTo>
-                  <a:lnTo>
-                    <a:pt x="6875762" y="485993"/>
-                  </a:lnTo>
-                  <a:lnTo>
-                    <a:pt x="6804139" y="479983"/>
-                  </a:lnTo>
-                  <a:lnTo>
-                    <a:pt x="6732517" y="473868"/>
-                  </a:lnTo>
-                  <a:lnTo>
-                    <a:pt x="6660894" y="467644"/>
-                  </a:lnTo>
-                  <a:lnTo>
-                    <a:pt x="6589272" y="461311"/>
-                  </a:lnTo>
-                  <a:lnTo>
-                    <a:pt x="6517649" y="454865"/>
-                  </a:lnTo>
-                  <a:lnTo>
-                    <a:pt x="6446027" y="448306"/>
-                  </a:lnTo>
-                  <a:lnTo>
-                    <a:pt x="6374404" y="441631"/>
-                  </a:lnTo>
-                  <a:lnTo>
-                    <a:pt x="6302782" y="434837"/>
-                  </a:lnTo>
-                  <a:lnTo>
-                    <a:pt x="6231159" y="427924"/>
-                  </a:lnTo>
-                  <a:lnTo>
-                    <a:pt x="6159537" y="420888"/>
-                  </a:lnTo>
-                  <a:lnTo>
-                    <a:pt x="6087914" y="413728"/>
-                  </a:lnTo>
-                  <a:lnTo>
-                    <a:pt x="6016292" y="406442"/>
-                  </a:lnTo>
-                  <a:lnTo>
-                    <a:pt x="5944669" y="399026"/>
-                  </a:lnTo>
-                  <a:lnTo>
-                    <a:pt x="5873047" y="391480"/>
-                  </a:lnTo>
-                  <a:lnTo>
-                    <a:pt x="5801424" y="383800"/>
-                  </a:lnTo>
-                  <a:lnTo>
-                    <a:pt x="5729802" y="375985"/>
-                  </a:lnTo>
-                  <a:lnTo>
-                    <a:pt x="5658179" y="368031"/>
-                  </a:lnTo>
-                  <a:lnTo>
-                    <a:pt x="5586557" y="359937"/>
-                  </a:lnTo>
-                  <a:lnTo>
-                    <a:pt x="5514934" y="351700"/>
-                  </a:lnTo>
-                  <a:lnTo>
-                    <a:pt x="5443311" y="343317"/>
-                  </a:lnTo>
-                  <a:lnTo>
-                    <a:pt x="5371689" y="334786"/>
-                  </a:lnTo>
-                  <a:lnTo>
-                    <a:pt x="5300066" y="326104"/>
-                  </a:lnTo>
-                  <a:lnTo>
-                    <a:pt x="5228444" y="317269"/>
-                  </a:lnTo>
-                  <a:lnTo>
-                    <a:pt x="5156821" y="308277"/>
-                  </a:lnTo>
-                  <a:lnTo>
-                    <a:pt x="5085199" y="299127"/>
-                  </a:lnTo>
-                  <a:lnTo>
-                    <a:pt x="5013576" y="289815"/>
-                  </a:lnTo>
-                  <a:lnTo>
-                    <a:pt x="4941954" y="280338"/>
-                  </a:lnTo>
-                  <a:lnTo>
-                    <a:pt x="4870331" y="270694"/>
-                  </a:lnTo>
-                  <a:lnTo>
-                    <a:pt x="4798709" y="260880"/>
-                  </a:lnTo>
-                  <a:lnTo>
-                    <a:pt x="4727086" y="250892"/>
-                  </a:lnTo>
-                  <a:lnTo>
-                    <a:pt x="4655464" y="240727"/>
-                  </a:lnTo>
-                  <a:lnTo>
-                    <a:pt x="4583841" y="230383"/>
-                  </a:lnTo>
-                  <a:lnTo>
-                    <a:pt x="4512219" y="219856"/>
-                  </a:lnTo>
-                  <a:lnTo>
-                    <a:pt x="4440596" y="209143"/>
-                  </a:lnTo>
-                  <a:lnTo>
-                    <a:pt x="4368974" y="198240"/>
-                  </a:lnTo>
-                  <a:lnTo>
-                    <a:pt x="4297351" y="187145"/>
-                  </a:lnTo>
-                  <a:lnTo>
-                    <a:pt x="4225729" y="175854"/>
-                  </a:lnTo>
-                  <a:lnTo>
-                    <a:pt x="4154106" y="164363"/>
-                  </a:lnTo>
-                  <a:lnTo>
-                    <a:pt x="4082483" y="152669"/>
-                  </a:lnTo>
-                  <a:lnTo>
-                    <a:pt x="4010861" y="140768"/>
-                  </a:lnTo>
-                  <a:lnTo>
-                    <a:pt x="3939238" y="128657"/>
-                  </a:lnTo>
-                  <a:lnTo>
-                    <a:pt x="3867616" y="116332"/>
-                  </a:lnTo>
-                  <a:lnTo>
-                    <a:pt x="3795993" y="103789"/>
-                  </a:lnTo>
-                  <a:lnTo>
-                    <a:pt x="3724371" y="91025"/>
-                  </a:lnTo>
-                  <a:lnTo>
-                    <a:pt x="3652748" y="78034"/>
-                  </a:lnTo>
-                  <a:lnTo>
-                    <a:pt x="3581126" y="64815"/>
-                  </a:lnTo>
-                  <a:lnTo>
-                    <a:pt x="3509503" y="51361"/>
-                  </a:lnTo>
-                  <a:lnTo>
-                    <a:pt x="3437881" y="37670"/>
-                  </a:lnTo>
-                  <a:lnTo>
-                    <a:pt x="3366258" y="23737"/>
-                  </a:lnTo>
-                  <a:lnTo>
-                    <a:pt x="3294636" y="9557"/>
-                  </a:lnTo>
-                  <a:lnTo>
-                    <a:pt x="3223013" y="0"/>
-                  </a:lnTo>
-                  <a:lnTo>
-                    <a:pt x="3151391" y="35395"/>
-                  </a:lnTo>
-                  <a:lnTo>
-                    <a:pt x="3079768" y="69273"/>
-                  </a:lnTo>
-                  <a:lnTo>
-                    <a:pt x="3008146" y="101700"/>
-                  </a:lnTo>
-                  <a:lnTo>
-                    <a:pt x="2936523" y="132737"/>
-                  </a:lnTo>
-                  <a:lnTo>
-                    <a:pt x="2864901" y="162444"/>
-                  </a:lnTo>
-                  <a:lnTo>
-                    <a:pt x="2793278" y="190878"/>
-                  </a:lnTo>
-                  <a:lnTo>
-                    <a:pt x="2721655" y="218094"/>
-                  </a:lnTo>
-                  <a:lnTo>
-                    <a:pt x="2650033" y="244143"/>
-                  </a:lnTo>
-                  <a:lnTo>
-                    <a:pt x="2578410" y="269076"/>
-                  </a:lnTo>
-                  <a:lnTo>
-                    <a:pt x="2506788" y="292941"/>
-                  </a:lnTo>
-                  <a:lnTo>
-                    <a:pt x="2435165" y="315783"/>
-                  </a:lnTo>
-                  <a:lnTo>
-                    <a:pt x="2363543" y="337646"/>
-                  </a:lnTo>
-                  <a:lnTo>
-                    <a:pt x="2291920" y="358573"/>
-                  </a:lnTo>
-                  <a:lnTo>
-                    <a:pt x="2220298" y="378602"/>
-                  </a:lnTo>
-                  <a:lnTo>
-                    <a:pt x="2148675" y="397774"/>
-                  </a:lnTo>
-                  <a:lnTo>
-                    <a:pt x="2077053" y="416123"/>
-                  </a:lnTo>
-                  <a:lnTo>
-                    <a:pt x="2005430" y="433687"/>
-                  </a:lnTo>
-                  <a:lnTo>
-                    <a:pt x="1933808" y="450498"/>
-                  </a:lnTo>
-                  <a:lnTo>
-                    <a:pt x="1862185" y="466588"/>
-                  </a:lnTo>
-                  <a:lnTo>
-                    <a:pt x="1790563" y="481989"/>
-                  </a:lnTo>
-                  <a:lnTo>
-                    <a:pt x="1718940" y="496730"/>
-                  </a:lnTo>
-                  <a:lnTo>
-                    <a:pt x="1647318" y="510839"/>
-                  </a:lnTo>
-                  <a:lnTo>
-                    <a:pt x="1575695" y="524344"/>
-                  </a:lnTo>
-                  <a:lnTo>
-                    <a:pt x="1504073" y="537270"/>
-                  </a:lnTo>
-                  <a:lnTo>
-                    <a:pt x="1432450" y="549642"/>
-                  </a:lnTo>
-                  <a:lnTo>
-                    <a:pt x="1360827" y="561484"/>
-                  </a:lnTo>
-                  <a:lnTo>
-                    <a:pt x="1289205" y="572818"/>
-                  </a:lnTo>
-                  <a:lnTo>
-                    <a:pt x="1217582" y="583667"/>
-                  </a:lnTo>
-                  <a:lnTo>
-                    <a:pt x="1145960" y="594051"/>
-                  </a:lnTo>
-                  <a:lnTo>
-                    <a:pt x="1074337" y="603990"/>
-                  </a:lnTo>
-                  <a:lnTo>
-                    <a:pt x="1002715" y="613503"/>
-                  </a:lnTo>
-                  <a:lnTo>
-                    <a:pt x="931092" y="622608"/>
-                  </a:lnTo>
-                  <a:lnTo>
-                    <a:pt x="859470" y="631323"/>
-                  </a:lnTo>
-                  <a:lnTo>
-                    <a:pt x="787847" y="639665"/>
-                  </a:lnTo>
-                  <a:lnTo>
-                    <a:pt x="716225" y="647649"/>
-                  </a:lnTo>
-                  <a:lnTo>
-                    <a:pt x="644602" y="655291"/>
-                  </a:lnTo>
-                  <a:lnTo>
-                    <a:pt x="572980" y="662606"/>
-                  </a:lnTo>
-                  <a:lnTo>
-                    <a:pt x="501357" y="669607"/>
-                  </a:lnTo>
-                  <a:lnTo>
-                    <a:pt x="429735" y="676308"/>
-                  </a:lnTo>
-                  <a:lnTo>
-                    <a:pt x="358112" y="682722"/>
-                  </a:lnTo>
-                  <a:lnTo>
-                    <a:pt x="286490" y="688861"/>
-                  </a:lnTo>
-                  <a:lnTo>
-                    <a:pt x="214867" y="694737"/>
-                  </a:lnTo>
-                  <a:lnTo>
-                    <a:pt x="143245" y="700362"/>
-                  </a:lnTo>
-                  <a:lnTo>
-                    <a:pt x="71622" y="705745"/>
-                  </a:lnTo>
-                  <a:lnTo>
-                    <a:pt x="0" y="710897"/>
+                    <a:pt x="7019007" y="492630"/>
+                  </a:lnTo>
+                  <a:lnTo>
+                    <a:pt x="6947385" y="486793"/>
+                  </a:lnTo>
+                  <a:lnTo>
+                    <a:pt x="6875762" y="480853"/>
+                  </a:lnTo>
+                  <a:lnTo>
+                    <a:pt x="6804139" y="474807"/>
+                  </a:lnTo>
+                  <a:lnTo>
+                    <a:pt x="6732517" y="468653"/>
+                  </a:lnTo>
+                  <a:lnTo>
+                    <a:pt x="6660894" y="462390"/>
+                  </a:lnTo>
+                  <a:lnTo>
+                    <a:pt x="6589272" y="456016"/>
+                  </a:lnTo>
+                  <a:lnTo>
+                    <a:pt x="6517649" y="449528"/>
+                  </a:lnTo>
+                  <a:lnTo>
+                    <a:pt x="6446027" y="442925"/>
+                  </a:lnTo>
+                  <a:lnTo>
+                    <a:pt x="6374404" y="436204"/>
+                  </a:lnTo>
+                  <a:lnTo>
+                    <a:pt x="6302782" y="429364"/>
+                  </a:lnTo>
+                  <a:lnTo>
+                    <a:pt x="6231159" y="422402"/>
+                  </a:lnTo>
+                  <a:lnTo>
+                    <a:pt x="6159537" y="415317"/>
+                  </a:lnTo>
+                  <a:lnTo>
+                    <a:pt x="6087914" y="408105"/>
+                  </a:lnTo>
+                  <a:lnTo>
+                    <a:pt x="6016292" y="400765"/>
+                  </a:lnTo>
+                  <a:lnTo>
+                    <a:pt x="5944669" y="393294"/>
+                  </a:lnTo>
+                  <a:lnTo>
+                    <a:pt x="5873047" y="385691"/>
+                  </a:lnTo>
+                  <a:lnTo>
+                    <a:pt x="5801424" y="377952"/>
+                  </a:lnTo>
+                  <a:lnTo>
+                    <a:pt x="5729802" y="370075"/>
+                  </a:lnTo>
+                  <a:lnTo>
+                    <a:pt x="5658179" y="362059"/>
+                  </a:lnTo>
+                  <a:lnTo>
+                    <a:pt x="5586557" y="353900"/>
+                  </a:lnTo>
+                  <a:lnTo>
+                    <a:pt x="5514934" y="345596"/>
+                  </a:lnTo>
+                  <a:lnTo>
+                    <a:pt x="5443311" y="337144"/>
+                  </a:lnTo>
+                  <a:lnTo>
+                    <a:pt x="5371689" y="328541"/>
+                  </a:lnTo>
+                  <a:lnTo>
+                    <a:pt x="5300066" y="319786"/>
+                  </a:lnTo>
+                  <a:lnTo>
+                    <a:pt x="5228444" y="310875"/>
+                  </a:lnTo>
+                  <a:lnTo>
+                    <a:pt x="5156821" y="301805"/>
+                  </a:lnTo>
+                  <a:lnTo>
+                    <a:pt x="5085199" y="292574"/>
+                  </a:lnTo>
+                  <a:lnTo>
+                    <a:pt x="5013576" y="283179"/>
+                  </a:lnTo>
+                  <a:lnTo>
+                    <a:pt x="4941954" y="273617"/>
+                  </a:lnTo>
+                  <a:lnTo>
+                    <a:pt x="4870331" y="263885"/>
+                  </a:lnTo>
+                  <a:lnTo>
+                    <a:pt x="4798709" y="253979"/>
+                  </a:lnTo>
+                  <a:lnTo>
+                    <a:pt x="4727086" y="243897"/>
+                  </a:lnTo>
+                  <a:lnTo>
+                    <a:pt x="4655464" y="233636"/>
+                  </a:lnTo>
+                  <a:lnTo>
+                    <a:pt x="4583841" y="223193"/>
+                  </a:lnTo>
+                  <a:lnTo>
+                    <a:pt x="4512219" y="212564"/>
+                  </a:lnTo>
+                  <a:lnTo>
+                    <a:pt x="4440596" y="201745"/>
+                  </a:lnTo>
+                  <a:lnTo>
+                    <a:pt x="4368974" y="190734"/>
+                  </a:lnTo>
+                  <a:lnTo>
+                    <a:pt x="4297351" y="179528"/>
+                  </a:lnTo>
+                  <a:lnTo>
+                    <a:pt x="4225729" y="168122"/>
+                  </a:lnTo>
+                  <a:lnTo>
+                    <a:pt x="4154106" y="156513"/>
+                  </a:lnTo>
+                  <a:lnTo>
+                    <a:pt x="4082483" y="144697"/>
+                  </a:lnTo>
+                  <a:lnTo>
+                    <a:pt x="4010861" y="132672"/>
+                  </a:lnTo>
+                  <a:lnTo>
+                    <a:pt x="3939238" y="120432"/>
+                  </a:lnTo>
+                  <a:lnTo>
+                    <a:pt x="3867616" y="107975"/>
+                  </a:lnTo>
+                  <a:lnTo>
+                    <a:pt x="3795993" y="95296"/>
+                  </a:lnTo>
+                  <a:lnTo>
+                    <a:pt x="3724371" y="82392"/>
+                  </a:lnTo>
+                  <a:lnTo>
+                    <a:pt x="3652748" y="69258"/>
+                  </a:lnTo>
+                  <a:lnTo>
+                    <a:pt x="3581126" y="55890"/>
+                  </a:lnTo>
+                  <a:lnTo>
+                    <a:pt x="3509503" y="42285"/>
+                  </a:lnTo>
+                  <a:lnTo>
+                    <a:pt x="3437881" y="28438"/>
+                  </a:lnTo>
+                  <a:lnTo>
+                    <a:pt x="3366258" y="14344"/>
+                  </a:lnTo>
+                  <a:lnTo>
+                    <a:pt x="3294636" y="0"/>
+                  </a:lnTo>
+                  <a:lnTo>
+                    <a:pt x="3223013" y="5664"/>
+                  </a:lnTo>
+                  <a:lnTo>
+                    <a:pt x="3151391" y="40524"/>
+                  </a:lnTo>
+                  <a:lnTo>
+                    <a:pt x="3079768" y="73892"/>
+                  </a:lnTo>
+                  <a:lnTo>
+                    <a:pt x="3008146" y="105834"/>
+                  </a:lnTo>
+                  <a:lnTo>
+                    <a:pt x="2936523" y="136409"/>
+                  </a:lnTo>
+                  <a:lnTo>
+                    <a:pt x="2864901" y="165677"/>
+                  </a:lnTo>
+                  <a:lnTo>
+                    <a:pt x="2793278" y="193693"/>
+                  </a:lnTo>
+                  <a:lnTo>
+                    <a:pt x="2721655" y="220511"/>
+                  </a:lnTo>
+                  <a:lnTo>
+                    <a:pt x="2650033" y="246182"/>
+                  </a:lnTo>
+                  <a:lnTo>
+                    <a:pt x="2578410" y="270755"/>
+                  </a:lnTo>
+                  <a:lnTo>
+                    <a:pt x="2506788" y="294277"/>
+                  </a:lnTo>
+                  <a:lnTo>
+                    <a:pt x="2435165" y="316793"/>
+                  </a:lnTo>
+                  <a:lnTo>
+                    <a:pt x="2363543" y="338346"/>
+                  </a:lnTo>
+                  <a:lnTo>
+                    <a:pt x="2291920" y="358977"/>
+                  </a:lnTo>
+                  <a:lnTo>
+                    <a:pt x="2220298" y="378726"/>
+                  </a:lnTo>
+                  <a:lnTo>
+                    <a:pt x="2148675" y="397630"/>
+                  </a:lnTo>
+                  <a:lnTo>
+                    <a:pt x="2077053" y="415726"/>
+                  </a:lnTo>
+                  <a:lnTo>
+                    <a:pt x="2005430" y="433048"/>
+                  </a:lnTo>
+                  <a:lnTo>
+                    <a:pt x="1933808" y="449629"/>
+                  </a:lnTo>
+                  <a:lnTo>
+                    <a:pt x="1862185" y="465500"/>
+                  </a:lnTo>
+                  <a:lnTo>
+                    <a:pt x="1790563" y="480693"/>
+                  </a:lnTo>
+                  <a:lnTo>
+                    <a:pt x="1718940" y="495237"/>
+                  </a:lnTo>
+                  <a:lnTo>
+                    <a:pt x="1647318" y="509158"/>
+                  </a:lnTo>
+                  <a:lnTo>
+                    <a:pt x="1575695" y="522484"/>
+                  </a:lnTo>
+                  <a:lnTo>
+                    <a:pt x="1504073" y="535240"/>
+                  </a:lnTo>
+                  <a:lnTo>
+                    <a:pt x="1432450" y="547450"/>
+                  </a:lnTo>
+                  <a:lnTo>
+                    <a:pt x="1360827" y="559138"/>
+                  </a:lnTo>
+                  <a:lnTo>
+                    <a:pt x="1289205" y="570327"/>
+                  </a:lnTo>
+                  <a:lnTo>
+                    <a:pt x="1217582" y="581036"/>
+                  </a:lnTo>
+                  <a:lnTo>
+                    <a:pt x="1145960" y="591288"/>
+                  </a:lnTo>
+                  <a:lnTo>
+                    <a:pt x="1074337" y="601101"/>
+                  </a:lnTo>
+                  <a:lnTo>
+                    <a:pt x="1002715" y="610495"/>
+                  </a:lnTo>
+                  <a:lnTo>
+                    <a:pt x="931092" y="619487"/>
+                  </a:lnTo>
+                  <a:lnTo>
+                    <a:pt x="859470" y="628094"/>
+                  </a:lnTo>
+                  <a:lnTo>
+                    <a:pt x="787847" y="636333"/>
+                  </a:lnTo>
+                  <a:lnTo>
+                    <a:pt x="716225" y="644220"/>
+                  </a:lnTo>
+                  <a:lnTo>
+                    <a:pt x="644602" y="651769"/>
+                  </a:lnTo>
+                  <a:lnTo>
+                    <a:pt x="572980" y="658996"/>
+                  </a:lnTo>
+                  <a:lnTo>
+                    <a:pt x="501357" y="665914"/>
+                  </a:lnTo>
+                  <a:lnTo>
+                    <a:pt x="429735" y="672535"/>
+                  </a:lnTo>
+                  <a:lnTo>
+                    <a:pt x="358112" y="678874"/>
+                  </a:lnTo>
+                  <a:lnTo>
+                    <a:pt x="286490" y="684941"/>
+                  </a:lnTo>
+                  <a:lnTo>
+                    <a:pt x="214867" y="690749"/>
+                  </a:lnTo>
+                  <a:lnTo>
+                    <a:pt x="143245" y="696308"/>
+                  </a:lnTo>
+                  <a:lnTo>
+                    <a:pt x="71622" y="701630"/>
+                  </a:lnTo>
+                  <a:lnTo>
+                    <a:pt x="0" y="706724"/>
                   </a:lnTo>
                 </a:path>
               </a:pathLst>
@@ -4633,309 +4639,309 @@
           </p:nvSpPr>
           <p:spPr>
             <a:xfrm>
-              <a:off x="1172049" y="3873131"/>
-              <a:ext cx="7090630" cy="1225469"/>
+              <a:off x="1172049" y="3888769"/>
+              <a:ext cx="7090630" cy="1209594"/>
             </a:xfrm>
             <a:custGeom>
               <a:avLst/>
               <a:pathLst>
-                <a:path w="7090630" h="1225469">
+                <a:path w="7090630" h="1209594">
                   <a:moveTo>
-                    <a:pt x="0" y="1225469"/>
+                    <a:pt x="0" y="1209594"/>
                   </a:moveTo>
                   <a:lnTo>
-                    <a:pt x="71622" y="1219403"/>
-                  </a:lnTo>
-                  <a:lnTo>
-                    <a:pt x="143245" y="1213257"/>
-                  </a:lnTo>
-                  <a:lnTo>
-                    <a:pt x="214867" y="1207030"/>
-                  </a:lnTo>
-                  <a:lnTo>
-                    <a:pt x="286490" y="1200720"/>
-                  </a:lnTo>
-                  <a:lnTo>
-                    <a:pt x="358112" y="1194327"/>
-                  </a:lnTo>
-                  <a:lnTo>
-                    <a:pt x="429735" y="1187850"/>
-                  </a:lnTo>
-                  <a:lnTo>
-                    <a:pt x="501357" y="1181286"/>
-                  </a:lnTo>
-                  <a:lnTo>
-                    <a:pt x="572980" y="1174636"/>
-                  </a:lnTo>
-                  <a:lnTo>
-                    <a:pt x="644602" y="1167898"/>
-                  </a:lnTo>
-                  <a:lnTo>
-                    <a:pt x="716225" y="1161071"/>
-                  </a:lnTo>
-                  <a:lnTo>
-                    <a:pt x="787847" y="1154154"/>
-                  </a:lnTo>
-                  <a:lnTo>
-                    <a:pt x="859470" y="1147145"/>
-                  </a:lnTo>
-                  <a:lnTo>
-                    <a:pt x="931092" y="1140043"/>
-                  </a:lnTo>
-                  <a:lnTo>
-                    <a:pt x="1002715" y="1132848"/>
-                  </a:lnTo>
-                  <a:lnTo>
-                    <a:pt x="1074337" y="1125557"/>
-                  </a:lnTo>
-                  <a:lnTo>
-                    <a:pt x="1145960" y="1118170"/>
-                  </a:lnTo>
-                  <a:lnTo>
-                    <a:pt x="1217582" y="1110685"/>
-                  </a:lnTo>
-                  <a:lnTo>
-                    <a:pt x="1289205" y="1103102"/>
-                  </a:lnTo>
-                  <a:lnTo>
-                    <a:pt x="1360827" y="1095418"/>
-                  </a:lnTo>
-                  <a:lnTo>
-                    <a:pt x="1432450" y="1087632"/>
-                  </a:lnTo>
-                  <a:lnTo>
-                    <a:pt x="1504073" y="1079743"/>
-                  </a:lnTo>
-                  <a:lnTo>
-                    <a:pt x="1575695" y="1071750"/>
-                  </a:lnTo>
-                  <a:lnTo>
-                    <a:pt x="1647318" y="1063652"/>
-                  </a:lnTo>
-                  <a:lnTo>
-                    <a:pt x="1718940" y="1055446"/>
-                  </a:lnTo>
-                  <a:lnTo>
-                    <a:pt x="1790563" y="1047131"/>
-                  </a:lnTo>
-                  <a:lnTo>
-                    <a:pt x="1862185" y="1038707"/>
-                  </a:lnTo>
-                  <a:lnTo>
-                    <a:pt x="1933808" y="1030172"/>
-                  </a:lnTo>
-                  <a:lnTo>
-                    <a:pt x="2005430" y="1021523"/>
-                  </a:lnTo>
-                  <a:lnTo>
-                    <a:pt x="2077053" y="1012760"/>
-                  </a:lnTo>
-                  <a:lnTo>
-                    <a:pt x="2148675" y="1003881"/>
-                  </a:lnTo>
-                  <a:lnTo>
-                    <a:pt x="2220298" y="994885"/>
-                  </a:lnTo>
-                  <a:lnTo>
-                    <a:pt x="2291920" y="985770"/>
-                  </a:lnTo>
-                  <a:lnTo>
-                    <a:pt x="2363543" y="976534"/>
-                  </a:lnTo>
-                  <a:lnTo>
-                    <a:pt x="2435165" y="967176"/>
-                  </a:lnTo>
-                  <a:lnTo>
-                    <a:pt x="2506788" y="957694"/>
-                  </a:lnTo>
-                  <a:lnTo>
-                    <a:pt x="2578410" y="948087"/>
-                  </a:lnTo>
-                  <a:lnTo>
-                    <a:pt x="2650033" y="938353"/>
-                  </a:lnTo>
-                  <a:lnTo>
-                    <a:pt x="2721655" y="928490"/>
-                  </a:lnTo>
-                  <a:lnTo>
-                    <a:pt x="2793278" y="918497"/>
-                  </a:lnTo>
-                  <a:lnTo>
-                    <a:pt x="2864901" y="908371"/>
-                  </a:lnTo>
-                  <a:lnTo>
-                    <a:pt x="2936523" y="898112"/>
-                  </a:lnTo>
-                  <a:lnTo>
-                    <a:pt x="3008146" y="887717"/>
-                  </a:lnTo>
-                  <a:lnTo>
-                    <a:pt x="3079768" y="877184"/>
-                  </a:lnTo>
-                  <a:lnTo>
-                    <a:pt x="3151391" y="866512"/>
-                  </a:lnTo>
-                  <a:lnTo>
-                    <a:pt x="3223013" y="855699"/>
-                  </a:lnTo>
-                  <a:lnTo>
-                    <a:pt x="3294636" y="844743"/>
-                  </a:lnTo>
-                  <a:lnTo>
-                    <a:pt x="3366258" y="833643"/>
-                  </a:lnTo>
-                  <a:lnTo>
-                    <a:pt x="3437881" y="822395"/>
-                  </a:lnTo>
-                  <a:lnTo>
-                    <a:pt x="3509503" y="810998"/>
-                  </a:lnTo>
-                  <a:lnTo>
-                    <a:pt x="3581126" y="799451"/>
-                  </a:lnTo>
-                  <a:lnTo>
-                    <a:pt x="3652748" y="787751"/>
-                  </a:lnTo>
-                  <a:lnTo>
-                    <a:pt x="3724371" y="775897"/>
-                  </a:lnTo>
-                  <a:lnTo>
-                    <a:pt x="3795993" y="763885"/>
-                  </a:lnTo>
-                  <a:lnTo>
-                    <a:pt x="3867616" y="751715"/>
-                  </a:lnTo>
-                  <a:lnTo>
-                    <a:pt x="3939238" y="739384"/>
-                  </a:lnTo>
-                  <a:lnTo>
-                    <a:pt x="4010861" y="726890"/>
-                  </a:lnTo>
-                  <a:lnTo>
-                    <a:pt x="4082483" y="714230"/>
-                  </a:lnTo>
-                  <a:lnTo>
-                    <a:pt x="4154106" y="701403"/>
-                  </a:lnTo>
-                  <a:lnTo>
-                    <a:pt x="4225729" y="688406"/>
-                  </a:lnTo>
-                  <a:lnTo>
-                    <a:pt x="4297351" y="675238"/>
-                  </a:lnTo>
-                  <a:lnTo>
-                    <a:pt x="4368974" y="661895"/>
-                  </a:lnTo>
-                  <a:lnTo>
-                    <a:pt x="4440596" y="648376"/>
-                  </a:lnTo>
-                  <a:lnTo>
-                    <a:pt x="4512219" y="634678"/>
-                  </a:lnTo>
-                  <a:lnTo>
-                    <a:pt x="4583841" y="620799"/>
-                  </a:lnTo>
-                  <a:lnTo>
-                    <a:pt x="4655464" y="606737"/>
-                  </a:lnTo>
-                  <a:lnTo>
-                    <a:pt x="4727086" y="592488"/>
-                  </a:lnTo>
-                  <a:lnTo>
-                    <a:pt x="4798709" y="578051"/>
-                  </a:lnTo>
-                  <a:lnTo>
-                    <a:pt x="4870331" y="563423"/>
-                  </a:lnTo>
-                  <a:lnTo>
-                    <a:pt x="4941954" y="548602"/>
-                  </a:lnTo>
-                  <a:lnTo>
-                    <a:pt x="5013576" y="533584"/>
-                  </a:lnTo>
-                  <a:lnTo>
-                    <a:pt x="5085199" y="518368"/>
-                  </a:lnTo>
-                  <a:lnTo>
-                    <a:pt x="5156821" y="502951"/>
-                  </a:lnTo>
-                  <a:lnTo>
-                    <a:pt x="5228444" y="487330"/>
-                  </a:lnTo>
-                  <a:lnTo>
-                    <a:pt x="5300066" y="471502"/>
-                  </a:lnTo>
-                  <a:lnTo>
-                    <a:pt x="5371689" y="455465"/>
-                  </a:lnTo>
-                  <a:lnTo>
-                    <a:pt x="5443311" y="439216"/>
-                  </a:lnTo>
-                  <a:lnTo>
-                    <a:pt x="5514934" y="422752"/>
-                  </a:lnTo>
-                  <a:lnTo>
-                    <a:pt x="5586557" y="406070"/>
-                  </a:lnTo>
-                  <a:lnTo>
-                    <a:pt x="5658179" y="389168"/>
-                  </a:lnTo>
-                  <a:lnTo>
-                    <a:pt x="5729802" y="372042"/>
-                  </a:lnTo>
-                  <a:lnTo>
-                    <a:pt x="5801424" y="354689"/>
-                  </a:lnTo>
-                  <a:lnTo>
-                    <a:pt x="5873047" y="337107"/>
-                  </a:lnTo>
-                  <a:lnTo>
-                    <a:pt x="5944669" y="319293"/>
-                  </a:lnTo>
-                  <a:lnTo>
-                    <a:pt x="6016292" y="301243"/>
-                  </a:lnTo>
-                  <a:lnTo>
-                    <a:pt x="6087914" y="282954"/>
-                  </a:lnTo>
-                  <a:lnTo>
-                    <a:pt x="6159537" y="264423"/>
-                  </a:lnTo>
-                  <a:lnTo>
-                    <a:pt x="6231159" y="245648"/>
-                  </a:lnTo>
-                  <a:lnTo>
-                    <a:pt x="6302782" y="226624"/>
-                  </a:lnTo>
-                  <a:lnTo>
-                    <a:pt x="6374404" y="207348"/>
-                  </a:lnTo>
-                  <a:lnTo>
-                    <a:pt x="6446027" y="187817"/>
-                  </a:lnTo>
-                  <a:lnTo>
-                    <a:pt x="6517649" y="168029"/>
-                  </a:lnTo>
-                  <a:lnTo>
-                    <a:pt x="6589272" y="147978"/>
-                  </a:lnTo>
-                  <a:lnTo>
-                    <a:pt x="6660894" y="127662"/>
-                  </a:lnTo>
-                  <a:lnTo>
-                    <a:pt x="6732517" y="107078"/>
-                  </a:lnTo>
-                  <a:lnTo>
-                    <a:pt x="6804139" y="86221"/>
-                  </a:lnTo>
-                  <a:lnTo>
-                    <a:pt x="6875762" y="65089"/>
-                  </a:lnTo>
-                  <a:lnTo>
-                    <a:pt x="6947385" y="43677"/>
-                  </a:lnTo>
-                  <a:lnTo>
-                    <a:pt x="7019007" y="21982"/>
+                    <a:pt x="71622" y="1203571"/>
+                  </a:lnTo>
+                  <a:lnTo>
+                    <a:pt x="143245" y="1197469"/>
+                  </a:lnTo>
+                  <a:lnTo>
+                    <a:pt x="214867" y="1191288"/>
+                  </a:lnTo>
+                  <a:lnTo>
+                    <a:pt x="286490" y="1185025"/>
+                  </a:lnTo>
+                  <a:lnTo>
+                    <a:pt x="358112" y="1178680"/>
+                  </a:lnTo>
+                  <a:lnTo>
+                    <a:pt x="429735" y="1172251"/>
+                  </a:lnTo>
+                  <a:lnTo>
+                    <a:pt x="501357" y="1165739"/>
+                  </a:lnTo>
+                  <a:lnTo>
+                    <a:pt x="572980" y="1159141"/>
+                  </a:lnTo>
+                  <a:lnTo>
+                    <a:pt x="644602" y="1152456"/>
+                  </a:lnTo>
+                  <a:lnTo>
+                    <a:pt x="716225" y="1145683"/>
+                  </a:lnTo>
+                  <a:lnTo>
+                    <a:pt x="787847" y="1138822"/>
+                  </a:lnTo>
+                  <a:lnTo>
+                    <a:pt x="859470" y="1131870"/>
+                  </a:lnTo>
+                  <a:lnTo>
+                    <a:pt x="931092" y="1124828"/>
+                  </a:lnTo>
+                  <a:lnTo>
+                    <a:pt x="1002715" y="1117693"/>
+                  </a:lnTo>
+                  <a:lnTo>
+                    <a:pt x="1074337" y="1110464"/>
+                  </a:lnTo>
+                  <a:lnTo>
+                    <a:pt x="1145960" y="1103140"/>
+                  </a:lnTo>
+                  <a:lnTo>
+                    <a:pt x="1217582" y="1095720"/>
+                  </a:lnTo>
+                  <a:lnTo>
+                    <a:pt x="1289205" y="1088203"/>
+                  </a:lnTo>
+                  <a:lnTo>
+                    <a:pt x="1360827" y="1080587"/>
+                  </a:lnTo>
+                  <a:lnTo>
+                    <a:pt x="1432450" y="1072872"/>
+                  </a:lnTo>
+                  <a:lnTo>
+                    <a:pt x="1504073" y="1065055"/>
+                  </a:lnTo>
+                  <a:lnTo>
+                    <a:pt x="1575695" y="1057135"/>
+                  </a:lnTo>
+                  <a:lnTo>
+                    <a:pt x="1647318" y="1049111"/>
+                  </a:lnTo>
+                  <a:lnTo>
+                    <a:pt x="1718940" y="1040983"/>
+                  </a:lnTo>
+                  <a:lnTo>
+                    <a:pt x="1790563" y="1032747"/>
+                  </a:lnTo>
+                  <a:lnTo>
+                    <a:pt x="1862185" y="1024403"/>
+                  </a:lnTo>
+                  <a:lnTo>
+                    <a:pt x="1933808" y="1015950"/>
+                  </a:lnTo>
+                  <a:lnTo>
+                    <a:pt x="2005430" y="1007386"/>
+                  </a:lnTo>
+                  <a:lnTo>
+                    <a:pt x="2077053" y="998710"/>
+                  </a:lnTo>
+                  <a:lnTo>
+                    <a:pt x="2148675" y="989919"/>
+                  </a:lnTo>
+                  <a:lnTo>
+                    <a:pt x="2220298" y="981014"/>
+                  </a:lnTo>
+                  <a:lnTo>
+                    <a:pt x="2291920" y="971991"/>
+                  </a:lnTo>
+                  <a:lnTo>
+                    <a:pt x="2363543" y="962850"/>
+                  </a:lnTo>
+                  <a:lnTo>
+                    <a:pt x="2435165" y="953589"/>
+                  </a:lnTo>
+                  <a:lnTo>
+                    <a:pt x="2506788" y="944206"/>
+                  </a:lnTo>
+                  <a:lnTo>
+                    <a:pt x="2578410" y="934701"/>
+                  </a:lnTo>
+                  <a:lnTo>
+                    <a:pt x="2650033" y="925070"/>
+                  </a:lnTo>
+                  <a:lnTo>
+                    <a:pt x="2721655" y="915314"/>
+                  </a:lnTo>
+                  <a:lnTo>
+                    <a:pt x="2793278" y="905429"/>
+                  </a:lnTo>
+                  <a:lnTo>
+                    <a:pt x="2864901" y="895414"/>
+                  </a:lnTo>
+                  <a:lnTo>
+                    <a:pt x="2936523" y="885268"/>
+                  </a:lnTo>
+                  <a:lnTo>
+                    <a:pt x="3008146" y="874989"/>
+                  </a:lnTo>
+                  <a:lnTo>
+                    <a:pt x="3079768" y="864575"/>
+                  </a:lnTo>
+                  <a:lnTo>
+                    <a:pt x="3151391" y="854024"/>
+                  </a:lnTo>
+                  <a:lnTo>
+                    <a:pt x="3223013" y="843335"/>
+                  </a:lnTo>
+                  <a:lnTo>
+                    <a:pt x="3294636" y="832505"/>
+                  </a:lnTo>
+                  <a:lnTo>
+                    <a:pt x="3366258" y="821533"/>
+                  </a:lnTo>
+                  <a:lnTo>
+                    <a:pt x="3437881" y="810418"/>
+                  </a:lnTo>
+                  <a:lnTo>
+                    <a:pt x="3509503" y="799156"/>
+                  </a:lnTo>
+                  <a:lnTo>
+                    <a:pt x="3581126" y="787747"/>
+                  </a:lnTo>
+                  <a:lnTo>
+                    <a:pt x="3652748" y="776188"/>
+                  </a:lnTo>
+                  <a:lnTo>
+                    <a:pt x="3724371" y="764477"/>
+                  </a:lnTo>
+                  <a:lnTo>
+                    <a:pt x="3795993" y="752612"/>
+                  </a:lnTo>
+                  <a:lnTo>
+                    <a:pt x="3867616" y="740592"/>
+                  </a:lnTo>
+                  <a:lnTo>
+                    <a:pt x="3939238" y="728414"/>
+                  </a:lnTo>
+                  <a:lnTo>
+                    <a:pt x="4010861" y="716076"/>
+                  </a:lnTo>
+                  <a:lnTo>
+                    <a:pt x="4082483" y="703576"/>
+                  </a:lnTo>
+                  <a:lnTo>
+                    <a:pt x="4154106" y="690912"/>
+                  </a:lnTo>
+                  <a:lnTo>
+                    <a:pt x="4225729" y="678082"/>
+                  </a:lnTo>
+                  <a:lnTo>
+                    <a:pt x="4297351" y="665084"/>
+                  </a:lnTo>
+                  <a:lnTo>
+                    <a:pt x="4368974" y="651915"/>
+                  </a:lnTo>
+                  <a:lnTo>
+                    <a:pt x="4440596" y="638573"/>
+                  </a:lnTo>
+                  <a:lnTo>
+                    <a:pt x="4512219" y="625056"/>
+                  </a:lnTo>
+                  <a:lnTo>
+                    <a:pt x="4583841" y="611362"/>
+                  </a:lnTo>
+                  <a:lnTo>
+                    <a:pt x="4655464" y="597488"/>
+                  </a:lnTo>
+                  <a:lnTo>
+                    <a:pt x="4727086" y="583432"/>
+                  </a:lnTo>
+                  <a:lnTo>
+                    <a:pt x="4798709" y="569191"/>
+                  </a:lnTo>
+                  <a:lnTo>
+                    <a:pt x="4870331" y="554764"/>
+                  </a:lnTo>
+                  <a:lnTo>
+                    <a:pt x="4941954" y="540147"/>
+                  </a:lnTo>
+                  <a:lnTo>
+                    <a:pt x="5013576" y="525338"/>
+                  </a:lnTo>
+                  <a:lnTo>
+                    <a:pt x="5085199" y="510335"/>
+                  </a:lnTo>
+                  <a:lnTo>
+                    <a:pt x="5156821" y="495135"/>
+                  </a:lnTo>
+                  <a:lnTo>
+                    <a:pt x="5228444" y="479735"/>
+                  </a:lnTo>
+                  <a:lnTo>
+                    <a:pt x="5300066" y="464134"/>
+                  </a:lnTo>
+                  <a:lnTo>
+                    <a:pt x="5371689" y="448327"/>
+                  </a:lnTo>
+                  <a:lnTo>
+                    <a:pt x="5443311" y="432314"/>
+                  </a:lnTo>
+                  <a:lnTo>
+                    <a:pt x="5514934" y="416090"/>
+                  </a:lnTo>
+                  <a:lnTo>
+                    <a:pt x="5586557" y="399653"/>
+                  </a:lnTo>
+                  <a:lnTo>
+                    <a:pt x="5658179" y="383000"/>
+                  </a:lnTo>
+                  <a:lnTo>
+                    <a:pt x="5729802" y="366129"/>
+                  </a:lnTo>
+                  <a:lnTo>
+                    <a:pt x="5801424" y="349036"/>
+                  </a:lnTo>
+                  <a:lnTo>
+                    <a:pt x="5873047" y="331719"/>
+                  </a:lnTo>
+                  <a:lnTo>
+                    <a:pt x="5944669" y="314175"/>
+                  </a:lnTo>
+                  <a:lnTo>
+                    <a:pt x="6016292" y="296400"/>
+                  </a:lnTo>
+                  <a:lnTo>
+                    <a:pt x="6087914" y="278393"/>
+                  </a:lnTo>
+                  <a:lnTo>
+                    <a:pt x="6159537" y="260149"/>
+                  </a:lnTo>
+                  <a:lnTo>
+                    <a:pt x="6231159" y="241665"/>
+                  </a:lnTo>
+                  <a:lnTo>
+                    <a:pt x="6302782" y="222939"/>
+                  </a:lnTo>
+                  <a:lnTo>
+                    <a:pt x="6374404" y="203967"/>
+                  </a:lnTo>
+                  <a:lnTo>
+                    <a:pt x="6446027" y="184746"/>
+                  </a:lnTo>
+                  <a:lnTo>
+                    <a:pt x="6517649" y="165273"/>
+                  </a:lnTo>
+                  <a:lnTo>
+                    <a:pt x="6589272" y="145544"/>
+                  </a:lnTo>
+                  <a:lnTo>
+                    <a:pt x="6660894" y="125556"/>
+                  </a:lnTo>
+                  <a:lnTo>
+                    <a:pt x="6732517" y="105306"/>
+                  </a:lnTo>
+                  <a:lnTo>
+                    <a:pt x="6804139" y="84791"/>
+                  </a:lnTo>
+                  <a:lnTo>
+                    <a:pt x="6875762" y="64006"/>
+                  </a:lnTo>
+                  <a:lnTo>
+                    <a:pt x="6947385" y="42948"/>
+                  </a:lnTo>
+                  <a:lnTo>
+                    <a:pt x="7019007" y="21614"/>
                   </a:lnTo>
                   <a:lnTo>
                     <a:pt x="7090630" y="0"/>
@@ -5010,7 +5016,7 @@
           </p:nvSpPr>
           <p:spPr>
             <a:xfrm>
-              <a:off x="4401933" y="2073503"/>
+              <a:off x="4423736" y="2073503"/>
               <a:ext cx="0" cy="3649639"/>
             </a:xfrm>
             <a:custGeom>
@@ -5053,7 +5059,7 @@
           </p:nvSpPr>
           <p:spPr>
             <a:xfrm>
-              <a:off x="3507589" y="2073503"/>
+              <a:off x="3470882" y="2073503"/>
               <a:ext cx="0" cy="3649639"/>
             </a:xfrm>
             <a:custGeom>
@@ -5096,7 +5102,7 @@
           </p:nvSpPr>
           <p:spPr>
             <a:xfrm>
-              <a:off x="5433405" y="2073503"/>
+              <a:off x="5437283" y="2073503"/>
               <a:ext cx="0" cy="3649639"/>
             </a:xfrm>
             <a:custGeom>
@@ -5369,7 +5375,7 @@
           </p:nvSpPr>
           <p:spPr>
             <a:xfrm>
-              <a:off x="842324" y="5785772"/>
+              <a:off x="843419" y="5785772"/>
               <a:ext cx="161574" cy="80101"/>
             </a:xfrm>
             <a:prstGeom prst="rect">
@@ -5415,7 +5421,7 @@
           </p:nvSpPr>
           <p:spPr>
             <a:xfrm>
-              <a:off x="1681960" y="5785772"/>
+              <a:off x="1681469" y="5785772"/>
               <a:ext cx="161574" cy="80101"/>
             </a:xfrm>
             <a:prstGeom prst="rect">
@@ -5461,7 +5467,7 @@
           </p:nvSpPr>
           <p:spPr>
             <a:xfrm>
-              <a:off x="2521596" y="5785772"/>
+              <a:off x="2519520" y="5785772"/>
               <a:ext cx="161574" cy="80101"/>
             </a:xfrm>
             <a:prstGeom prst="rect">
@@ -5507,7 +5513,7 @@
           </p:nvSpPr>
           <p:spPr>
             <a:xfrm>
-              <a:off x="3361232" y="5785772"/>
+              <a:off x="3357571" y="5785772"/>
               <a:ext cx="161574" cy="80101"/>
             </a:xfrm>
             <a:prstGeom prst="rect">
@@ -5553,7 +5559,7 @@
           </p:nvSpPr>
           <p:spPr>
             <a:xfrm>
-              <a:off x="4200868" y="5785772"/>
+              <a:off x="4195621" y="5785772"/>
               <a:ext cx="161574" cy="80101"/>
             </a:xfrm>
             <a:prstGeom prst="rect">
@@ -5599,7 +5605,7 @@
           </p:nvSpPr>
           <p:spPr>
             <a:xfrm>
-              <a:off x="5090202" y="5785772"/>
+              <a:off x="5083370" y="5785772"/>
               <a:ext cx="62179" cy="80101"/>
             </a:xfrm>
             <a:prstGeom prst="rect">
@@ -5645,7 +5651,7 @@
           </p:nvSpPr>
           <p:spPr>
             <a:xfrm>
-              <a:off x="5898749" y="5785772"/>
+              <a:off x="5890331" y="5785772"/>
               <a:ext cx="124358" cy="80101"/>
             </a:xfrm>
             <a:prstGeom prst="rect">
@@ -5691,7 +5697,7 @@
           </p:nvSpPr>
           <p:spPr>
             <a:xfrm>
-              <a:off x="6738385" y="5785772"/>
+              <a:off x="6728381" y="5785772"/>
               <a:ext cx="124358" cy="80101"/>
             </a:xfrm>
             <a:prstGeom prst="rect">
@@ -5737,7 +5743,7 @@
           </p:nvSpPr>
           <p:spPr>
             <a:xfrm>
-              <a:off x="7578021" y="5785772"/>
+              <a:off x="7566432" y="5785772"/>
               <a:ext cx="124358" cy="80101"/>
             </a:xfrm>
             <a:prstGeom prst="rect">
@@ -5783,7 +5789,7 @@
           </p:nvSpPr>
           <p:spPr>
             <a:xfrm>
-              <a:off x="8417657" y="5785772"/>
+              <a:off x="8404483" y="5785772"/>
               <a:ext cx="124358" cy="80101"/>
             </a:xfrm>
             <a:prstGeom prst="rect">
@@ -5954,7 +5960,7 @@
                   <a:latin typeface="Helvetica"/>
                   <a:cs typeface="Helvetica"/>
                 </a:rPr>
-                <a:t>subHR per 10 % decline: 0.86 (0.60-1.23), p_Bonf = 1.000 (n = 6)  |  per IQR decline (Δ = 22.9 %): 0.70 (0.31-1.60)  |  IQR: [-19.2, 3.7] %</a:t>
+                <a:t>subHR per 10 % decline: 0.86 (0.60-1.23), p_Bonf = 1.000 (n = 6)  |  per IQR decline (Δ = 23.5 %): 0.70 (0.30-1.62)  |  IQR: [-19.6, 3.9] %</a:t>
               </a:r>
             </a:p>
           </p:txBody>
